--- a/tests/testdata/excel/PowerPoint/多数スライド.pptx
+++ b/tests/testdata/excel/PowerPoint/多数スライド.pptx
@@ -228,7 +228,7 @@
           <p:cNvPr id="2" name="タイトル 1">
             <a:extLst>
               <a:ext uri="{FF2B5EF4-FFF2-40B4-BE49-F238E27FC236}">
-                <a16:creationId xmlns:a16="http://schemas.microsoft.com/office/drawing/2014/main" id="{EDFFA169-4C05-0BFA-4ED8-FC2F73EBEC5B}"/>
+                <a16:creationId xmlns:a16="http://schemas.microsoft.com/office/drawing/2014/main" id="{E7F244DF-3203-8D71-5CB0-88EB78697E76}"/>
               </a:ext>
             </a:extLst>
           </p:cNvPr>
@@ -265,7 +265,7 @@
           <p:cNvPr id="3" name="字幕 2">
             <a:extLst>
               <a:ext uri="{FF2B5EF4-FFF2-40B4-BE49-F238E27FC236}">
-                <a16:creationId xmlns:a16="http://schemas.microsoft.com/office/drawing/2014/main" id="{2D43C94B-3A55-DCA1-6ABC-BAA1A42FBED7}"/>
+                <a16:creationId xmlns:a16="http://schemas.microsoft.com/office/drawing/2014/main" id="{E277A851-3DF7-62ED-2279-8D087BC9B45E}"/>
               </a:ext>
             </a:extLst>
           </p:cNvPr>
@@ -335,7 +335,7 @@
           <p:cNvPr id="4" name="日付プレースホルダー 3">
             <a:extLst>
               <a:ext uri="{FF2B5EF4-FFF2-40B4-BE49-F238E27FC236}">
-                <a16:creationId xmlns:a16="http://schemas.microsoft.com/office/drawing/2014/main" id="{0B70D5DE-90DF-C696-4FB9-BC0B8D7C81B4}"/>
+                <a16:creationId xmlns:a16="http://schemas.microsoft.com/office/drawing/2014/main" id="{5C442CD0-F971-7080-3C1E-A6BD809F00E9}"/>
               </a:ext>
             </a:extLst>
           </p:cNvPr>
@@ -351,7 +351,7 @@
           <a:bodyPr/>
           <a:lstStyle/>
           <a:p>
-            <a:fld id="{36A266F4-05BF-447F-9E94-21CBFC9CBEBB}" type="datetimeFigureOut">
+            <a:fld id="{AD8669CD-8760-48F0-845F-08D04249F900}" type="datetimeFigureOut">
               <a:rPr kumimoji="1" lang="ja-JP" altLang="en-US" smtClean="0"/>
               <a:t>2026/9/20</a:t>
             </a:fld>
@@ -364,7 +364,7 @@
           <p:cNvPr id="5" name="フッター プレースホルダー 4">
             <a:extLst>
               <a:ext uri="{FF2B5EF4-FFF2-40B4-BE49-F238E27FC236}">
-                <a16:creationId xmlns:a16="http://schemas.microsoft.com/office/drawing/2014/main" id="{9C31CF55-38DD-5BBD-1237-694AA18085B3}"/>
+                <a16:creationId xmlns:a16="http://schemas.microsoft.com/office/drawing/2014/main" id="{0F52FE75-51D7-651B-E434-95FB84C9A76E}"/>
               </a:ext>
             </a:extLst>
           </p:cNvPr>
@@ -389,7 +389,7 @@
           <p:cNvPr id="6" name="スライド番号プレースホルダー 5">
             <a:extLst>
               <a:ext uri="{FF2B5EF4-FFF2-40B4-BE49-F238E27FC236}">
-                <a16:creationId xmlns:a16="http://schemas.microsoft.com/office/drawing/2014/main" id="{F28A94D4-A6F5-3E87-B039-7B8E3BD15082}"/>
+                <a16:creationId xmlns:a16="http://schemas.microsoft.com/office/drawing/2014/main" id="{446D345E-199C-4C0A-6FBF-4841B372B39E}"/>
               </a:ext>
             </a:extLst>
           </p:cNvPr>
@@ -405,7 +405,7 @@
           <a:bodyPr/>
           <a:lstStyle/>
           <a:p>
-            <a:fld id="{EDBA39AF-BDDA-49E1-917F-24C239FCBFB9}" type="slidenum">
+            <a:fld id="{478D4EE2-F517-4E63-9D73-3B4AC98DE8A5}" type="slidenum">
               <a:rPr kumimoji="1" lang="ja-JP" altLang="en-US" smtClean="0"/>
               <a:t>‹#›</a:t>
             </a:fld>
@@ -416,7 +416,7 @@
     </p:spTree>
     <p:extLst>
       <p:ext uri="{BB962C8B-B14F-4D97-AF65-F5344CB8AC3E}">
-        <p14:creationId xmlns:p14="http://schemas.microsoft.com/office/powerpoint/2010/main" val="1318553409"/>
+        <p14:creationId xmlns:p14="http://schemas.microsoft.com/office/powerpoint/2010/main" val="205344625"/>
       </p:ext>
     </p:extLst>
   </p:cSld>
@@ -448,7 +448,7 @@
           <p:cNvPr id="2" name="タイトル 1">
             <a:extLst>
               <a:ext uri="{FF2B5EF4-FFF2-40B4-BE49-F238E27FC236}">
-                <a16:creationId xmlns:a16="http://schemas.microsoft.com/office/drawing/2014/main" id="{ED40971F-6FAB-B5A9-3773-1F97F0531876}"/>
+                <a16:creationId xmlns:a16="http://schemas.microsoft.com/office/drawing/2014/main" id="{EC83D39B-BDFE-3E12-08D1-9B0C15D59C9F}"/>
               </a:ext>
             </a:extLst>
           </p:cNvPr>
@@ -476,7 +476,7 @@
           <p:cNvPr id="3" name="縦書きテキスト プレースホルダー 2">
             <a:extLst>
               <a:ext uri="{FF2B5EF4-FFF2-40B4-BE49-F238E27FC236}">
-                <a16:creationId xmlns:a16="http://schemas.microsoft.com/office/drawing/2014/main" id="{465CB37B-EF5D-9BBB-C53D-4211CBEEA106}"/>
+                <a16:creationId xmlns:a16="http://schemas.microsoft.com/office/drawing/2014/main" id="{F47A35E8-CA31-D487-641C-385B92C5E4DE}"/>
               </a:ext>
             </a:extLst>
           </p:cNvPr>
@@ -565,7 +565,7 @@
           <p:cNvPr id="4" name="日付プレースホルダー 3">
             <a:extLst>
               <a:ext uri="{FF2B5EF4-FFF2-40B4-BE49-F238E27FC236}">
-                <a16:creationId xmlns:a16="http://schemas.microsoft.com/office/drawing/2014/main" id="{83A18DD4-AF81-90EF-53C4-8E3575A09EC6}"/>
+                <a16:creationId xmlns:a16="http://schemas.microsoft.com/office/drawing/2014/main" id="{E20BB68C-132E-A4C9-43FF-BB748FE427EC}"/>
               </a:ext>
             </a:extLst>
           </p:cNvPr>
@@ -581,7 +581,7 @@
           <a:bodyPr/>
           <a:lstStyle/>
           <a:p>
-            <a:fld id="{36A266F4-05BF-447F-9E94-21CBFC9CBEBB}" type="datetimeFigureOut">
+            <a:fld id="{AD8669CD-8760-48F0-845F-08D04249F900}" type="datetimeFigureOut">
               <a:rPr kumimoji="1" lang="ja-JP" altLang="en-US" smtClean="0"/>
               <a:t>2026/9/20</a:t>
             </a:fld>
@@ -594,7 +594,7 @@
           <p:cNvPr id="5" name="フッター プレースホルダー 4">
             <a:extLst>
               <a:ext uri="{FF2B5EF4-FFF2-40B4-BE49-F238E27FC236}">
-                <a16:creationId xmlns:a16="http://schemas.microsoft.com/office/drawing/2014/main" id="{3D91C10E-1C73-48AF-CD9B-3A7E35B03905}"/>
+                <a16:creationId xmlns:a16="http://schemas.microsoft.com/office/drawing/2014/main" id="{09AE8DA0-61E7-ED67-36A4-A57924A9C6C9}"/>
               </a:ext>
             </a:extLst>
           </p:cNvPr>
@@ -619,7 +619,7 @@
           <p:cNvPr id="6" name="スライド番号プレースホルダー 5">
             <a:extLst>
               <a:ext uri="{FF2B5EF4-FFF2-40B4-BE49-F238E27FC236}">
-                <a16:creationId xmlns:a16="http://schemas.microsoft.com/office/drawing/2014/main" id="{FD898535-6D23-1E6C-CD0E-4F5B52CF2C2D}"/>
+                <a16:creationId xmlns:a16="http://schemas.microsoft.com/office/drawing/2014/main" id="{1910D9C7-1491-5FD5-DF49-DF53E0AC39E6}"/>
               </a:ext>
             </a:extLst>
           </p:cNvPr>
@@ -635,7 +635,7 @@
           <a:bodyPr/>
           <a:lstStyle/>
           <a:p>
-            <a:fld id="{EDBA39AF-BDDA-49E1-917F-24C239FCBFB9}" type="slidenum">
+            <a:fld id="{478D4EE2-F517-4E63-9D73-3B4AC98DE8A5}" type="slidenum">
               <a:rPr kumimoji="1" lang="ja-JP" altLang="en-US" smtClean="0"/>
               <a:t>‹#›</a:t>
             </a:fld>
@@ -646,7 +646,7 @@
     </p:spTree>
     <p:extLst>
       <p:ext uri="{BB962C8B-B14F-4D97-AF65-F5344CB8AC3E}">
-        <p14:creationId xmlns:p14="http://schemas.microsoft.com/office/powerpoint/2010/main" val="2191487094"/>
+        <p14:creationId xmlns:p14="http://schemas.microsoft.com/office/powerpoint/2010/main" val="403173853"/>
       </p:ext>
     </p:extLst>
   </p:cSld>
@@ -678,7 +678,7 @@
           <p:cNvPr id="2" name="縦書きタイトル 1">
             <a:extLst>
               <a:ext uri="{FF2B5EF4-FFF2-40B4-BE49-F238E27FC236}">
-                <a16:creationId xmlns:a16="http://schemas.microsoft.com/office/drawing/2014/main" id="{E47922D5-65BA-7E53-1DA9-4490E8CC4C7A}"/>
+                <a16:creationId xmlns:a16="http://schemas.microsoft.com/office/drawing/2014/main" id="{B692248E-65A4-2C96-EEED-4EEE626255B7}"/>
               </a:ext>
             </a:extLst>
           </p:cNvPr>
@@ -711,7 +711,7 @@
           <p:cNvPr id="3" name="縦書きテキスト プレースホルダー 2">
             <a:extLst>
               <a:ext uri="{FF2B5EF4-FFF2-40B4-BE49-F238E27FC236}">
-                <a16:creationId xmlns:a16="http://schemas.microsoft.com/office/drawing/2014/main" id="{B738BD41-080F-C6E1-9B38-0F8BD5DB79DB}"/>
+                <a16:creationId xmlns:a16="http://schemas.microsoft.com/office/drawing/2014/main" id="{577CF855-7488-6911-33F6-DDFA6A053D9E}"/>
               </a:ext>
             </a:extLst>
           </p:cNvPr>
@@ -805,7 +805,7 @@
           <p:cNvPr id="4" name="日付プレースホルダー 3">
             <a:extLst>
               <a:ext uri="{FF2B5EF4-FFF2-40B4-BE49-F238E27FC236}">
-                <a16:creationId xmlns:a16="http://schemas.microsoft.com/office/drawing/2014/main" id="{B7B54B00-F3CD-4DA7-3989-E0778097385A}"/>
+                <a16:creationId xmlns:a16="http://schemas.microsoft.com/office/drawing/2014/main" id="{61623E17-DD66-4578-563E-A316212F4D3D}"/>
               </a:ext>
             </a:extLst>
           </p:cNvPr>
@@ -821,7 +821,7 @@
           <a:bodyPr/>
           <a:lstStyle/>
           <a:p>
-            <a:fld id="{36A266F4-05BF-447F-9E94-21CBFC9CBEBB}" type="datetimeFigureOut">
+            <a:fld id="{AD8669CD-8760-48F0-845F-08D04249F900}" type="datetimeFigureOut">
               <a:rPr kumimoji="1" lang="ja-JP" altLang="en-US" smtClean="0"/>
               <a:t>2026/9/20</a:t>
             </a:fld>
@@ -834,7 +834,7 @@
           <p:cNvPr id="5" name="フッター プレースホルダー 4">
             <a:extLst>
               <a:ext uri="{FF2B5EF4-FFF2-40B4-BE49-F238E27FC236}">
-                <a16:creationId xmlns:a16="http://schemas.microsoft.com/office/drawing/2014/main" id="{7FCD4D0E-3131-B7B3-57D8-C37D887A4C70}"/>
+                <a16:creationId xmlns:a16="http://schemas.microsoft.com/office/drawing/2014/main" id="{1BD90789-9FF1-FBAE-9DE6-1C094406F5A1}"/>
               </a:ext>
             </a:extLst>
           </p:cNvPr>
@@ -859,7 +859,7 @@
           <p:cNvPr id="6" name="スライド番号プレースホルダー 5">
             <a:extLst>
               <a:ext uri="{FF2B5EF4-FFF2-40B4-BE49-F238E27FC236}">
-                <a16:creationId xmlns:a16="http://schemas.microsoft.com/office/drawing/2014/main" id="{6E4FA939-809F-C736-1A3C-872F152676F5}"/>
+                <a16:creationId xmlns:a16="http://schemas.microsoft.com/office/drawing/2014/main" id="{310E8B6F-0B54-6C07-2080-2084A535E732}"/>
               </a:ext>
             </a:extLst>
           </p:cNvPr>
@@ -875,7 +875,7 @@
           <a:bodyPr/>
           <a:lstStyle/>
           <a:p>
-            <a:fld id="{EDBA39AF-BDDA-49E1-917F-24C239FCBFB9}" type="slidenum">
+            <a:fld id="{478D4EE2-F517-4E63-9D73-3B4AC98DE8A5}" type="slidenum">
               <a:rPr kumimoji="1" lang="ja-JP" altLang="en-US" smtClean="0"/>
               <a:t>‹#›</a:t>
             </a:fld>
@@ -886,7 +886,7 @@
     </p:spTree>
     <p:extLst>
       <p:ext uri="{BB962C8B-B14F-4D97-AF65-F5344CB8AC3E}">
-        <p14:creationId xmlns:p14="http://schemas.microsoft.com/office/powerpoint/2010/main" val="418720451"/>
+        <p14:creationId xmlns:p14="http://schemas.microsoft.com/office/powerpoint/2010/main" val="2350760048"/>
       </p:ext>
     </p:extLst>
   </p:cSld>
@@ -918,7 +918,7 @@
           <p:cNvPr id="2" name="タイトル 1">
             <a:extLst>
               <a:ext uri="{FF2B5EF4-FFF2-40B4-BE49-F238E27FC236}">
-                <a16:creationId xmlns:a16="http://schemas.microsoft.com/office/drawing/2014/main" id="{75678A95-E38D-DDCD-5047-B6F0CB750B16}"/>
+                <a16:creationId xmlns:a16="http://schemas.microsoft.com/office/drawing/2014/main" id="{8A088BE4-AD2B-43C7-8DC0-464243C387D9}"/>
               </a:ext>
             </a:extLst>
           </p:cNvPr>
@@ -946,7 +946,7 @@
           <p:cNvPr id="3" name="コンテンツ プレースホルダー 2">
             <a:extLst>
               <a:ext uri="{FF2B5EF4-FFF2-40B4-BE49-F238E27FC236}">
-                <a16:creationId xmlns:a16="http://schemas.microsoft.com/office/drawing/2014/main" id="{D0A2EA07-D027-38E5-D6F0-5608EEE9F0D2}"/>
+                <a16:creationId xmlns:a16="http://schemas.microsoft.com/office/drawing/2014/main" id="{F029D935-43C9-DDA5-B428-076D06312E33}"/>
               </a:ext>
             </a:extLst>
           </p:cNvPr>
@@ -1035,7 +1035,7 @@
           <p:cNvPr id="4" name="日付プレースホルダー 3">
             <a:extLst>
               <a:ext uri="{FF2B5EF4-FFF2-40B4-BE49-F238E27FC236}">
-                <a16:creationId xmlns:a16="http://schemas.microsoft.com/office/drawing/2014/main" id="{7925B78D-F85A-3D90-986F-E54001B0ED60}"/>
+                <a16:creationId xmlns:a16="http://schemas.microsoft.com/office/drawing/2014/main" id="{97AFD120-54FF-6F98-9F8B-6F9F93A122DE}"/>
               </a:ext>
             </a:extLst>
           </p:cNvPr>
@@ -1051,7 +1051,7 @@
           <a:bodyPr/>
           <a:lstStyle/>
           <a:p>
-            <a:fld id="{36A266F4-05BF-447F-9E94-21CBFC9CBEBB}" type="datetimeFigureOut">
+            <a:fld id="{AD8669CD-8760-48F0-845F-08D04249F900}" type="datetimeFigureOut">
               <a:rPr kumimoji="1" lang="ja-JP" altLang="en-US" smtClean="0"/>
               <a:t>2026/9/20</a:t>
             </a:fld>
@@ -1064,7 +1064,7 @@
           <p:cNvPr id="5" name="フッター プレースホルダー 4">
             <a:extLst>
               <a:ext uri="{FF2B5EF4-FFF2-40B4-BE49-F238E27FC236}">
-                <a16:creationId xmlns:a16="http://schemas.microsoft.com/office/drawing/2014/main" id="{B0CE2F42-DCC6-D3FC-E273-4BE04C30A15A}"/>
+                <a16:creationId xmlns:a16="http://schemas.microsoft.com/office/drawing/2014/main" id="{AFA56EC0-2D42-2D24-29CD-F69C86574A6F}"/>
               </a:ext>
             </a:extLst>
           </p:cNvPr>
@@ -1089,7 +1089,7 @@
           <p:cNvPr id="6" name="スライド番号プレースホルダー 5">
             <a:extLst>
               <a:ext uri="{FF2B5EF4-FFF2-40B4-BE49-F238E27FC236}">
-                <a16:creationId xmlns:a16="http://schemas.microsoft.com/office/drawing/2014/main" id="{A7F37C1B-77DE-2471-08DB-26DC8C0C06EE}"/>
+                <a16:creationId xmlns:a16="http://schemas.microsoft.com/office/drawing/2014/main" id="{4A3766D0-2B11-0A15-7B5D-F2892E50712A}"/>
               </a:ext>
             </a:extLst>
           </p:cNvPr>
@@ -1105,7 +1105,7 @@
           <a:bodyPr/>
           <a:lstStyle/>
           <a:p>
-            <a:fld id="{EDBA39AF-BDDA-49E1-917F-24C239FCBFB9}" type="slidenum">
+            <a:fld id="{478D4EE2-F517-4E63-9D73-3B4AC98DE8A5}" type="slidenum">
               <a:rPr kumimoji="1" lang="ja-JP" altLang="en-US" smtClean="0"/>
               <a:t>‹#›</a:t>
             </a:fld>
@@ -1116,7 +1116,7 @@
     </p:spTree>
     <p:extLst>
       <p:ext uri="{BB962C8B-B14F-4D97-AF65-F5344CB8AC3E}">
-        <p14:creationId xmlns:p14="http://schemas.microsoft.com/office/powerpoint/2010/main" val="3289502979"/>
+        <p14:creationId xmlns:p14="http://schemas.microsoft.com/office/powerpoint/2010/main" val="3309886681"/>
       </p:ext>
     </p:extLst>
   </p:cSld>
@@ -1148,7 +1148,7 @@
           <p:cNvPr id="2" name="タイトル 1">
             <a:extLst>
               <a:ext uri="{FF2B5EF4-FFF2-40B4-BE49-F238E27FC236}">
-                <a16:creationId xmlns:a16="http://schemas.microsoft.com/office/drawing/2014/main" id="{0F45A6B7-AEF8-CC1A-EF2E-DB0125BF98F0}"/>
+                <a16:creationId xmlns:a16="http://schemas.microsoft.com/office/drawing/2014/main" id="{A0A11833-A1D4-02E8-4CAA-E90689B2CE9F}"/>
               </a:ext>
             </a:extLst>
           </p:cNvPr>
@@ -1185,7 +1185,7 @@
           <p:cNvPr id="3" name="テキスト プレースホルダー 2">
             <a:extLst>
               <a:ext uri="{FF2B5EF4-FFF2-40B4-BE49-F238E27FC236}">
-                <a16:creationId xmlns:a16="http://schemas.microsoft.com/office/drawing/2014/main" id="{155B8A1B-CEE3-73B5-D26B-53951FD4AC75}"/>
+                <a16:creationId xmlns:a16="http://schemas.microsoft.com/office/drawing/2014/main" id="{CB2A404D-E6B0-7E0E-84B9-87C78A50AF2E}"/>
               </a:ext>
             </a:extLst>
           </p:cNvPr>
@@ -1310,7 +1310,7 @@
           <p:cNvPr id="4" name="日付プレースホルダー 3">
             <a:extLst>
               <a:ext uri="{FF2B5EF4-FFF2-40B4-BE49-F238E27FC236}">
-                <a16:creationId xmlns:a16="http://schemas.microsoft.com/office/drawing/2014/main" id="{5A103B68-A44B-15B0-D33B-829909BD1101}"/>
+                <a16:creationId xmlns:a16="http://schemas.microsoft.com/office/drawing/2014/main" id="{8FF2B97A-9A60-7251-F685-2BFA174E31EE}"/>
               </a:ext>
             </a:extLst>
           </p:cNvPr>
@@ -1326,7 +1326,7 @@
           <a:bodyPr/>
           <a:lstStyle/>
           <a:p>
-            <a:fld id="{36A266F4-05BF-447F-9E94-21CBFC9CBEBB}" type="datetimeFigureOut">
+            <a:fld id="{AD8669CD-8760-48F0-845F-08D04249F900}" type="datetimeFigureOut">
               <a:rPr kumimoji="1" lang="ja-JP" altLang="en-US" smtClean="0"/>
               <a:t>2026/9/20</a:t>
             </a:fld>
@@ -1339,7 +1339,7 @@
           <p:cNvPr id="5" name="フッター プレースホルダー 4">
             <a:extLst>
               <a:ext uri="{FF2B5EF4-FFF2-40B4-BE49-F238E27FC236}">
-                <a16:creationId xmlns:a16="http://schemas.microsoft.com/office/drawing/2014/main" id="{CF22E4C2-BF04-B371-02F0-29B461390A59}"/>
+                <a16:creationId xmlns:a16="http://schemas.microsoft.com/office/drawing/2014/main" id="{56BEC052-0290-ED32-090F-38BCFA0B26B6}"/>
               </a:ext>
             </a:extLst>
           </p:cNvPr>
@@ -1364,7 +1364,7 @@
           <p:cNvPr id="6" name="スライド番号プレースホルダー 5">
             <a:extLst>
               <a:ext uri="{FF2B5EF4-FFF2-40B4-BE49-F238E27FC236}">
-                <a16:creationId xmlns:a16="http://schemas.microsoft.com/office/drawing/2014/main" id="{A3C5037A-80B2-6CDF-544B-F8AA8FE5A7D2}"/>
+                <a16:creationId xmlns:a16="http://schemas.microsoft.com/office/drawing/2014/main" id="{B3E4A66C-164C-21C8-7051-CA67EB84D8EA}"/>
               </a:ext>
             </a:extLst>
           </p:cNvPr>
@@ -1380,7 +1380,7 @@
           <a:bodyPr/>
           <a:lstStyle/>
           <a:p>
-            <a:fld id="{EDBA39AF-BDDA-49E1-917F-24C239FCBFB9}" type="slidenum">
+            <a:fld id="{478D4EE2-F517-4E63-9D73-3B4AC98DE8A5}" type="slidenum">
               <a:rPr kumimoji="1" lang="ja-JP" altLang="en-US" smtClean="0"/>
               <a:t>‹#›</a:t>
             </a:fld>
@@ -1391,7 +1391,7 @@
     </p:spTree>
     <p:extLst>
       <p:ext uri="{BB962C8B-B14F-4D97-AF65-F5344CB8AC3E}">
-        <p14:creationId xmlns:p14="http://schemas.microsoft.com/office/powerpoint/2010/main" val="877149666"/>
+        <p14:creationId xmlns:p14="http://schemas.microsoft.com/office/powerpoint/2010/main" val="1628943263"/>
       </p:ext>
     </p:extLst>
   </p:cSld>
@@ -1423,7 +1423,7 @@
           <p:cNvPr id="2" name="タイトル 1">
             <a:extLst>
               <a:ext uri="{FF2B5EF4-FFF2-40B4-BE49-F238E27FC236}">
-                <a16:creationId xmlns:a16="http://schemas.microsoft.com/office/drawing/2014/main" id="{1E0A777A-C1ED-F9B2-4376-D648AE4ADD14}"/>
+                <a16:creationId xmlns:a16="http://schemas.microsoft.com/office/drawing/2014/main" id="{65BB503F-2329-CD78-BBFC-0FFC77F957AE}"/>
               </a:ext>
             </a:extLst>
           </p:cNvPr>
@@ -1451,7 +1451,7 @@
           <p:cNvPr id="3" name="コンテンツ プレースホルダー 2">
             <a:extLst>
               <a:ext uri="{FF2B5EF4-FFF2-40B4-BE49-F238E27FC236}">
-                <a16:creationId xmlns:a16="http://schemas.microsoft.com/office/drawing/2014/main" id="{4194A6E7-6A03-49D0-2230-AD1F0AE2543B}"/>
+                <a16:creationId xmlns:a16="http://schemas.microsoft.com/office/drawing/2014/main" id="{EA3727CF-8327-3AA8-C352-604FD571DF2F}"/>
               </a:ext>
             </a:extLst>
           </p:cNvPr>
@@ -1545,7 +1545,7 @@
           <p:cNvPr id="4" name="コンテンツ プレースホルダー 3">
             <a:extLst>
               <a:ext uri="{FF2B5EF4-FFF2-40B4-BE49-F238E27FC236}">
-                <a16:creationId xmlns:a16="http://schemas.microsoft.com/office/drawing/2014/main" id="{B728958E-7D1C-F93F-E72E-5DBFD92BA1E4}"/>
+                <a16:creationId xmlns:a16="http://schemas.microsoft.com/office/drawing/2014/main" id="{42FC5C5B-B8C0-E0A1-A0AA-07B4F3CDE159}"/>
               </a:ext>
             </a:extLst>
           </p:cNvPr>
@@ -1639,7 +1639,7 @@
           <p:cNvPr id="5" name="日付プレースホルダー 4">
             <a:extLst>
               <a:ext uri="{FF2B5EF4-FFF2-40B4-BE49-F238E27FC236}">
-                <a16:creationId xmlns:a16="http://schemas.microsoft.com/office/drawing/2014/main" id="{1B173D95-D57E-7F30-1494-BCCABB956A90}"/>
+                <a16:creationId xmlns:a16="http://schemas.microsoft.com/office/drawing/2014/main" id="{B1330484-4C32-65B7-1E13-CD8655522633}"/>
               </a:ext>
             </a:extLst>
           </p:cNvPr>
@@ -1655,7 +1655,7 @@
           <a:bodyPr/>
           <a:lstStyle/>
           <a:p>
-            <a:fld id="{36A266F4-05BF-447F-9E94-21CBFC9CBEBB}" type="datetimeFigureOut">
+            <a:fld id="{AD8669CD-8760-48F0-845F-08D04249F900}" type="datetimeFigureOut">
               <a:rPr kumimoji="1" lang="ja-JP" altLang="en-US" smtClean="0"/>
               <a:t>2026/9/20</a:t>
             </a:fld>
@@ -1668,7 +1668,7 @@
           <p:cNvPr id="6" name="フッター プレースホルダー 5">
             <a:extLst>
               <a:ext uri="{FF2B5EF4-FFF2-40B4-BE49-F238E27FC236}">
-                <a16:creationId xmlns:a16="http://schemas.microsoft.com/office/drawing/2014/main" id="{E8A56C52-ADF0-1F95-9A55-6002B49E2CEA}"/>
+                <a16:creationId xmlns:a16="http://schemas.microsoft.com/office/drawing/2014/main" id="{0755E5A0-0610-9E73-52E8-397F909C8BC8}"/>
               </a:ext>
             </a:extLst>
           </p:cNvPr>
@@ -1693,7 +1693,7 @@
           <p:cNvPr id="7" name="スライド番号プレースホルダー 6">
             <a:extLst>
               <a:ext uri="{FF2B5EF4-FFF2-40B4-BE49-F238E27FC236}">
-                <a16:creationId xmlns:a16="http://schemas.microsoft.com/office/drawing/2014/main" id="{64C940B6-F6B3-3ED0-A4E0-09820E6402D4}"/>
+                <a16:creationId xmlns:a16="http://schemas.microsoft.com/office/drawing/2014/main" id="{7ECE7D8C-AA6B-7C06-0575-9B1BDA5DFF26}"/>
               </a:ext>
             </a:extLst>
           </p:cNvPr>
@@ -1709,7 +1709,7 @@
           <a:bodyPr/>
           <a:lstStyle/>
           <a:p>
-            <a:fld id="{EDBA39AF-BDDA-49E1-917F-24C239FCBFB9}" type="slidenum">
+            <a:fld id="{478D4EE2-F517-4E63-9D73-3B4AC98DE8A5}" type="slidenum">
               <a:rPr kumimoji="1" lang="ja-JP" altLang="en-US" smtClean="0"/>
               <a:t>‹#›</a:t>
             </a:fld>
@@ -1720,7 +1720,7 @@
     </p:spTree>
     <p:extLst>
       <p:ext uri="{BB962C8B-B14F-4D97-AF65-F5344CB8AC3E}">
-        <p14:creationId xmlns:p14="http://schemas.microsoft.com/office/powerpoint/2010/main" val="4051422474"/>
+        <p14:creationId xmlns:p14="http://schemas.microsoft.com/office/powerpoint/2010/main" val="2420120537"/>
       </p:ext>
     </p:extLst>
   </p:cSld>
@@ -1752,7 +1752,7 @@
           <p:cNvPr id="2" name="タイトル 1">
             <a:extLst>
               <a:ext uri="{FF2B5EF4-FFF2-40B4-BE49-F238E27FC236}">
-                <a16:creationId xmlns:a16="http://schemas.microsoft.com/office/drawing/2014/main" id="{D8EC5A46-2424-B9A0-2179-88938F5D0772}"/>
+                <a16:creationId xmlns:a16="http://schemas.microsoft.com/office/drawing/2014/main" id="{23AE77EC-4062-2037-2E2F-69376EA051D3}"/>
               </a:ext>
             </a:extLst>
           </p:cNvPr>
@@ -1785,7 +1785,7 @@
           <p:cNvPr id="3" name="テキスト プレースホルダー 2">
             <a:extLst>
               <a:ext uri="{FF2B5EF4-FFF2-40B4-BE49-F238E27FC236}">
-                <a16:creationId xmlns:a16="http://schemas.microsoft.com/office/drawing/2014/main" id="{593D2F41-9FF1-DB42-2C32-DB38954F8B83}"/>
+                <a16:creationId xmlns:a16="http://schemas.microsoft.com/office/drawing/2014/main" id="{141D2D53-8AE3-611A-61B6-232CF958ACC8}"/>
               </a:ext>
             </a:extLst>
           </p:cNvPr>
@@ -1856,7 +1856,7 @@
           <p:cNvPr id="4" name="コンテンツ プレースホルダー 3">
             <a:extLst>
               <a:ext uri="{FF2B5EF4-FFF2-40B4-BE49-F238E27FC236}">
-                <a16:creationId xmlns:a16="http://schemas.microsoft.com/office/drawing/2014/main" id="{75A6FC20-9EE0-765B-354C-CF4F55FA4C0C}"/>
+                <a16:creationId xmlns:a16="http://schemas.microsoft.com/office/drawing/2014/main" id="{58CB458B-F227-C184-22DF-C915174D6864}"/>
               </a:ext>
             </a:extLst>
           </p:cNvPr>
@@ -1950,7 +1950,7 @@
           <p:cNvPr id="5" name="テキスト プレースホルダー 4">
             <a:extLst>
               <a:ext uri="{FF2B5EF4-FFF2-40B4-BE49-F238E27FC236}">
-                <a16:creationId xmlns:a16="http://schemas.microsoft.com/office/drawing/2014/main" id="{66BDDDA6-32E7-E646-B340-70BF50B3D7D0}"/>
+                <a16:creationId xmlns:a16="http://schemas.microsoft.com/office/drawing/2014/main" id="{1572040F-8B80-0989-438F-DB6B18FD3C43}"/>
               </a:ext>
             </a:extLst>
           </p:cNvPr>
@@ -2021,7 +2021,7 @@
           <p:cNvPr id="6" name="コンテンツ プレースホルダー 5">
             <a:extLst>
               <a:ext uri="{FF2B5EF4-FFF2-40B4-BE49-F238E27FC236}">
-                <a16:creationId xmlns:a16="http://schemas.microsoft.com/office/drawing/2014/main" id="{EC1F24E1-7548-4C8B-1285-924BA4DA516A}"/>
+                <a16:creationId xmlns:a16="http://schemas.microsoft.com/office/drawing/2014/main" id="{03829FE9-5432-E5C1-B874-AAE74976A2AF}"/>
               </a:ext>
             </a:extLst>
           </p:cNvPr>
@@ -2115,7 +2115,7 @@
           <p:cNvPr id="7" name="日付プレースホルダー 6">
             <a:extLst>
               <a:ext uri="{FF2B5EF4-FFF2-40B4-BE49-F238E27FC236}">
-                <a16:creationId xmlns:a16="http://schemas.microsoft.com/office/drawing/2014/main" id="{2EFB5A26-E142-F184-78CF-E63EA435DDE3}"/>
+                <a16:creationId xmlns:a16="http://schemas.microsoft.com/office/drawing/2014/main" id="{D292A86C-D96D-8288-CE3C-D04D623507E9}"/>
               </a:ext>
             </a:extLst>
           </p:cNvPr>
@@ -2131,7 +2131,7 @@
           <a:bodyPr/>
           <a:lstStyle/>
           <a:p>
-            <a:fld id="{36A266F4-05BF-447F-9E94-21CBFC9CBEBB}" type="datetimeFigureOut">
+            <a:fld id="{AD8669CD-8760-48F0-845F-08D04249F900}" type="datetimeFigureOut">
               <a:rPr kumimoji="1" lang="ja-JP" altLang="en-US" smtClean="0"/>
               <a:t>2026/9/20</a:t>
             </a:fld>
@@ -2144,7 +2144,7 @@
           <p:cNvPr id="8" name="フッター プレースホルダー 7">
             <a:extLst>
               <a:ext uri="{FF2B5EF4-FFF2-40B4-BE49-F238E27FC236}">
-                <a16:creationId xmlns:a16="http://schemas.microsoft.com/office/drawing/2014/main" id="{9931904B-A3B4-64D3-D96C-AC1038951A8B}"/>
+                <a16:creationId xmlns:a16="http://schemas.microsoft.com/office/drawing/2014/main" id="{6E834630-FB6F-B579-C082-D1CB8130B69C}"/>
               </a:ext>
             </a:extLst>
           </p:cNvPr>
@@ -2169,7 +2169,7 @@
           <p:cNvPr id="9" name="スライド番号プレースホルダー 8">
             <a:extLst>
               <a:ext uri="{FF2B5EF4-FFF2-40B4-BE49-F238E27FC236}">
-                <a16:creationId xmlns:a16="http://schemas.microsoft.com/office/drawing/2014/main" id="{AB3051BB-E120-5A8A-ED86-D16988054948}"/>
+                <a16:creationId xmlns:a16="http://schemas.microsoft.com/office/drawing/2014/main" id="{A100D14C-102F-3CA9-BBD8-E594B4DACD6E}"/>
               </a:ext>
             </a:extLst>
           </p:cNvPr>
@@ -2185,7 +2185,7 @@
           <a:bodyPr/>
           <a:lstStyle/>
           <a:p>
-            <a:fld id="{EDBA39AF-BDDA-49E1-917F-24C239FCBFB9}" type="slidenum">
+            <a:fld id="{478D4EE2-F517-4E63-9D73-3B4AC98DE8A5}" type="slidenum">
               <a:rPr kumimoji="1" lang="ja-JP" altLang="en-US" smtClean="0"/>
               <a:t>‹#›</a:t>
             </a:fld>
@@ -2196,7 +2196,7 @@
     </p:spTree>
     <p:extLst>
       <p:ext uri="{BB962C8B-B14F-4D97-AF65-F5344CB8AC3E}">
-        <p14:creationId xmlns:p14="http://schemas.microsoft.com/office/powerpoint/2010/main" val="1251330607"/>
+        <p14:creationId xmlns:p14="http://schemas.microsoft.com/office/powerpoint/2010/main" val="2927007006"/>
       </p:ext>
     </p:extLst>
   </p:cSld>
@@ -2228,7 +2228,7 @@
           <p:cNvPr id="2" name="タイトル 1">
             <a:extLst>
               <a:ext uri="{FF2B5EF4-FFF2-40B4-BE49-F238E27FC236}">
-                <a16:creationId xmlns:a16="http://schemas.microsoft.com/office/drawing/2014/main" id="{A23E4FED-4639-237A-492B-18B9D6B782B1}"/>
+                <a16:creationId xmlns:a16="http://schemas.microsoft.com/office/drawing/2014/main" id="{55CDF347-3925-8C4E-1EB1-025EA41E83A8}"/>
               </a:ext>
             </a:extLst>
           </p:cNvPr>
@@ -2256,7 +2256,7 @@
           <p:cNvPr id="3" name="日付プレースホルダー 2">
             <a:extLst>
               <a:ext uri="{FF2B5EF4-FFF2-40B4-BE49-F238E27FC236}">
-                <a16:creationId xmlns:a16="http://schemas.microsoft.com/office/drawing/2014/main" id="{AE31FF8D-3BDE-0AC6-C2CE-CCC1C1E280E4}"/>
+                <a16:creationId xmlns:a16="http://schemas.microsoft.com/office/drawing/2014/main" id="{A344478D-109B-6A47-137B-9338E7181C0A}"/>
               </a:ext>
             </a:extLst>
           </p:cNvPr>
@@ -2272,7 +2272,7 @@
           <a:bodyPr/>
           <a:lstStyle/>
           <a:p>
-            <a:fld id="{36A266F4-05BF-447F-9E94-21CBFC9CBEBB}" type="datetimeFigureOut">
+            <a:fld id="{AD8669CD-8760-48F0-845F-08D04249F900}" type="datetimeFigureOut">
               <a:rPr kumimoji="1" lang="ja-JP" altLang="en-US" smtClean="0"/>
               <a:t>2026/9/20</a:t>
             </a:fld>
@@ -2285,7 +2285,7 @@
           <p:cNvPr id="4" name="フッター プレースホルダー 3">
             <a:extLst>
               <a:ext uri="{FF2B5EF4-FFF2-40B4-BE49-F238E27FC236}">
-                <a16:creationId xmlns:a16="http://schemas.microsoft.com/office/drawing/2014/main" id="{6882BB3C-7CA8-9876-0CB8-8DDEA523E743}"/>
+                <a16:creationId xmlns:a16="http://schemas.microsoft.com/office/drawing/2014/main" id="{D6352E18-72D1-7FBE-BE30-C3B56327DCF7}"/>
               </a:ext>
             </a:extLst>
           </p:cNvPr>
@@ -2310,7 +2310,7 @@
           <p:cNvPr id="5" name="スライド番号プレースホルダー 4">
             <a:extLst>
               <a:ext uri="{FF2B5EF4-FFF2-40B4-BE49-F238E27FC236}">
-                <a16:creationId xmlns:a16="http://schemas.microsoft.com/office/drawing/2014/main" id="{83A53BBC-7D89-023C-F550-0E1D5F2CE09E}"/>
+                <a16:creationId xmlns:a16="http://schemas.microsoft.com/office/drawing/2014/main" id="{DB3FDDD7-9F50-1EF4-1BC5-3D8D762D38D8}"/>
               </a:ext>
             </a:extLst>
           </p:cNvPr>
@@ -2326,7 +2326,7 @@
           <a:bodyPr/>
           <a:lstStyle/>
           <a:p>
-            <a:fld id="{EDBA39AF-BDDA-49E1-917F-24C239FCBFB9}" type="slidenum">
+            <a:fld id="{478D4EE2-F517-4E63-9D73-3B4AC98DE8A5}" type="slidenum">
               <a:rPr kumimoji="1" lang="ja-JP" altLang="en-US" smtClean="0"/>
               <a:t>‹#›</a:t>
             </a:fld>
@@ -2337,7 +2337,7 @@
     </p:spTree>
     <p:extLst>
       <p:ext uri="{BB962C8B-B14F-4D97-AF65-F5344CB8AC3E}">
-        <p14:creationId xmlns:p14="http://schemas.microsoft.com/office/powerpoint/2010/main" val="1580188290"/>
+        <p14:creationId xmlns:p14="http://schemas.microsoft.com/office/powerpoint/2010/main" val="1354151729"/>
       </p:ext>
     </p:extLst>
   </p:cSld>
@@ -2369,7 +2369,7 @@
           <p:cNvPr id="2" name="日付プレースホルダー 1">
             <a:extLst>
               <a:ext uri="{FF2B5EF4-FFF2-40B4-BE49-F238E27FC236}">
-                <a16:creationId xmlns:a16="http://schemas.microsoft.com/office/drawing/2014/main" id="{EAAF6AFF-8220-A1DA-C68C-0979F5BB491C}"/>
+                <a16:creationId xmlns:a16="http://schemas.microsoft.com/office/drawing/2014/main" id="{3886793A-D4FB-0705-115A-5B692FD9A1B0}"/>
               </a:ext>
             </a:extLst>
           </p:cNvPr>
@@ -2385,7 +2385,7 @@
           <a:bodyPr/>
           <a:lstStyle/>
           <a:p>
-            <a:fld id="{36A266F4-05BF-447F-9E94-21CBFC9CBEBB}" type="datetimeFigureOut">
+            <a:fld id="{AD8669CD-8760-48F0-845F-08D04249F900}" type="datetimeFigureOut">
               <a:rPr kumimoji="1" lang="ja-JP" altLang="en-US" smtClean="0"/>
               <a:t>2026/9/20</a:t>
             </a:fld>
@@ -2398,7 +2398,7 @@
           <p:cNvPr id="3" name="フッター プレースホルダー 2">
             <a:extLst>
               <a:ext uri="{FF2B5EF4-FFF2-40B4-BE49-F238E27FC236}">
-                <a16:creationId xmlns:a16="http://schemas.microsoft.com/office/drawing/2014/main" id="{2710F8DA-27F6-063A-3D74-98F677F9AED0}"/>
+                <a16:creationId xmlns:a16="http://schemas.microsoft.com/office/drawing/2014/main" id="{A65DB873-3DCA-9A9F-78AC-6F57F13582BA}"/>
               </a:ext>
             </a:extLst>
           </p:cNvPr>
@@ -2423,7 +2423,7 @@
           <p:cNvPr id="4" name="スライド番号プレースホルダー 3">
             <a:extLst>
               <a:ext uri="{FF2B5EF4-FFF2-40B4-BE49-F238E27FC236}">
-                <a16:creationId xmlns:a16="http://schemas.microsoft.com/office/drawing/2014/main" id="{D4771200-1EEF-4DD9-1038-F3325860DC70}"/>
+                <a16:creationId xmlns:a16="http://schemas.microsoft.com/office/drawing/2014/main" id="{55A546F3-EAC3-0617-B147-9BA0DC0658DF}"/>
               </a:ext>
             </a:extLst>
           </p:cNvPr>
@@ -2439,7 +2439,7 @@
           <a:bodyPr/>
           <a:lstStyle/>
           <a:p>
-            <a:fld id="{EDBA39AF-BDDA-49E1-917F-24C239FCBFB9}" type="slidenum">
+            <a:fld id="{478D4EE2-F517-4E63-9D73-3B4AC98DE8A5}" type="slidenum">
               <a:rPr kumimoji="1" lang="ja-JP" altLang="en-US" smtClean="0"/>
               <a:t>‹#›</a:t>
             </a:fld>
@@ -2450,7 +2450,7 @@
     </p:spTree>
     <p:extLst>
       <p:ext uri="{BB962C8B-B14F-4D97-AF65-F5344CB8AC3E}">
-        <p14:creationId xmlns:p14="http://schemas.microsoft.com/office/powerpoint/2010/main" val="837338329"/>
+        <p14:creationId xmlns:p14="http://schemas.microsoft.com/office/powerpoint/2010/main" val="1779121442"/>
       </p:ext>
     </p:extLst>
   </p:cSld>
@@ -2482,7 +2482,7 @@
           <p:cNvPr id="2" name="タイトル 1">
             <a:extLst>
               <a:ext uri="{FF2B5EF4-FFF2-40B4-BE49-F238E27FC236}">
-                <a16:creationId xmlns:a16="http://schemas.microsoft.com/office/drawing/2014/main" id="{E4627440-DD9B-5CF0-2350-0C6B8BF74F2F}"/>
+                <a16:creationId xmlns:a16="http://schemas.microsoft.com/office/drawing/2014/main" id="{41FE89A4-F726-F940-9DE9-2BC629F50473}"/>
               </a:ext>
             </a:extLst>
           </p:cNvPr>
@@ -2519,7 +2519,7 @@
           <p:cNvPr id="3" name="コンテンツ プレースホルダー 2">
             <a:extLst>
               <a:ext uri="{FF2B5EF4-FFF2-40B4-BE49-F238E27FC236}">
-                <a16:creationId xmlns:a16="http://schemas.microsoft.com/office/drawing/2014/main" id="{61CE9F08-70B9-2705-6398-26AB687F4BB2}"/>
+                <a16:creationId xmlns:a16="http://schemas.microsoft.com/office/drawing/2014/main" id="{EED7BE62-8AD6-7B50-3ADF-BCC963F37A91}"/>
               </a:ext>
             </a:extLst>
           </p:cNvPr>
@@ -2641,7 +2641,7 @@
           <p:cNvPr id="4" name="テキスト プレースホルダー 3">
             <a:extLst>
               <a:ext uri="{FF2B5EF4-FFF2-40B4-BE49-F238E27FC236}">
-                <a16:creationId xmlns:a16="http://schemas.microsoft.com/office/drawing/2014/main" id="{411B51F4-646A-4C4D-AEFA-6F416A885F6D}"/>
+                <a16:creationId xmlns:a16="http://schemas.microsoft.com/office/drawing/2014/main" id="{D0CFE85D-3F2F-8CA2-1777-B80B8455A17E}"/>
               </a:ext>
             </a:extLst>
           </p:cNvPr>
@@ -2712,7 +2712,7 @@
           <p:cNvPr id="5" name="日付プレースホルダー 4">
             <a:extLst>
               <a:ext uri="{FF2B5EF4-FFF2-40B4-BE49-F238E27FC236}">
-                <a16:creationId xmlns:a16="http://schemas.microsoft.com/office/drawing/2014/main" id="{256520FD-D517-9CD7-CD6A-E3F7D8482367}"/>
+                <a16:creationId xmlns:a16="http://schemas.microsoft.com/office/drawing/2014/main" id="{F8B2D5F3-0E38-7146-68EE-C0CF51327B05}"/>
               </a:ext>
             </a:extLst>
           </p:cNvPr>
@@ -2728,7 +2728,7 @@
           <a:bodyPr/>
           <a:lstStyle/>
           <a:p>
-            <a:fld id="{36A266F4-05BF-447F-9E94-21CBFC9CBEBB}" type="datetimeFigureOut">
+            <a:fld id="{AD8669CD-8760-48F0-845F-08D04249F900}" type="datetimeFigureOut">
               <a:rPr kumimoji="1" lang="ja-JP" altLang="en-US" smtClean="0"/>
               <a:t>2026/9/20</a:t>
             </a:fld>
@@ -2741,7 +2741,7 @@
           <p:cNvPr id="6" name="フッター プレースホルダー 5">
             <a:extLst>
               <a:ext uri="{FF2B5EF4-FFF2-40B4-BE49-F238E27FC236}">
-                <a16:creationId xmlns:a16="http://schemas.microsoft.com/office/drawing/2014/main" id="{788CC6B7-694A-A33B-6209-015A0686C698}"/>
+                <a16:creationId xmlns:a16="http://schemas.microsoft.com/office/drawing/2014/main" id="{DF6A7F20-8F8C-0BB8-BDAC-8A34F0DF2705}"/>
               </a:ext>
             </a:extLst>
           </p:cNvPr>
@@ -2766,7 +2766,7 @@
           <p:cNvPr id="7" name="スライド番号プレースホルダー 6">
             <a:extLst>
               <a:ext uri="{FF2B5EF4-FFF2-40B4-BE49-F238E27FC236}">
-                <a16:creationId xmlns:a16="http://schemas.microsoft.com/office/drawing/2014/main" id="{8C0B8592-58BC-5755-1442-1DB6C0C6349B}"/>
+                <a16:creationId xmlns:a16="http://schemas.microsoft.com/office/drawing/2014/main" id="{A516D1A9-CA91-3112-7620-BBE3B65A2242}"/>
               </a:ext>
             </a:extLst>
           </p:cNvPr>
@@ -2782,7 +2782,7 @@
           <a:bodyPr/>
           <a:lstStyle/>
           <a:p>
-            <a:fld id="{EDBA39AF-BDDA-49E1-917F-24C239FCBFB9}" type="slidenum">
+            <a:fld id="{478D4EE2-F517-4E63-9D73-3B4AC98DE8A5}" type="slidenum">
               <a:rPr kumimoji="1" lang="ja-JP" altLang="en-US" smtClean="0"/>
               <a:t>‹#›</a:t>
             </a:fld>
@@ -2793,7 +2793,7 @@
     </p:spTree>
     <p:extLst>
       <p:ext uri="{BB962C8B-B14F-4D97-AF65-F5344CB8AC3E}">
-        <p14:creationId xmlns:p14="http://schemas.microsoft.com/office/powerpoint/2010/main" val="1315338641"/>
+        <p14:creationId xmlns:p14="http://schemas.microsoft.com/office/powerpoint/2010/main" val="2850919020"/>
       </p:ext>
     </p:extLst>
   </p:cSld>
@@ -2825,7 +2825,7 @@
           <p:cNvPr id="2" name="タイトル 1">
             <a:extLst>
               <a:ext uri="{FF2B5EF4-FFF2-40B4-BE49-F238E27FC236}">
-                <a16:creationId xmlns:a16="http://schemas.microsoft.com/office/drawing/2014/main" id="{9ED48832-45FB-023C-8F29-BD282FF61539}"/>
+                <a16:creationId xmlns:a16="http://schemas.microsoft.com/office/drawing/2014/main" id="{16B9AC40-2635-D0E4-FD4B-FD1B5F8DDCE4}"/>
               </a:ext>
             </a:extLst>
           </p:cNvPr>
@@ -2862,7 +2862,7 @@
           <p:cNvPr id="3" name="図プレースホルダー 2">
             <a:extLst>
               <a:ext uri="{FF2B5EF4-FFF2-40B4-BE49-F238E27FC236}">
-                <a16:creationId xmlns:a16="http://schemas.microsoft.com/office/drawing/2014/main" id="{5C71043A-0DD0-33F1-C67F-E7E9E28CC38C}"/>
+                <a16:creationId xmlns:a16="http://schemas.microsoft.com/office/drawing/2014/main" id="{E271E335-2C36-AC60-ACA7-287BEEA29A7D}"/>
               </a:ext>
             </a:extLst>
           </p:cNvPr>
@@ -2929,7 +2929,7 @@
           <p:cNvPr id="4" name="テキスト プレースホルダー 3">
             <a:extLst>
               <a:ext uri="{FF2B5EF4-FFF2-40B4-BE49-F238E27FC236}">
-                <a16:creationId xmlns:a16="http://schemas.microsoft.com/office/drawing/2014/main" id="{5EC9C8C4-0D34-50B9-8D74-3A730B4E39C7}"/>
+                <a16:creationId xmlns:a16="http://schemas.microsoft.com/office/drawing/2014/main" id="{70F690F9-91BD-A5B5-B2A8-AC850699F7C8}"/>
               </a:ext>
             </a:extLst>
           </p:cNvPr>
@@ -3000,7 +3000,7 @@
           <p:cNvPr id="5" name="日付プレースホルダー 4">
             <a:extLst>
               <a:ext uri="{FF2B5EF4-FFF2-40B4-BE49-F238E27FC236}">
-                <a16:creationId xmlns:a16="http://schemas.microsoft.com/office/drawing/2014/main" id="{FBB299BC-F77F-3B63-EBCC-C1330DBBBB76}"/>
+                <a16:creationId xmlns:a16="http://schemas.microsoft.com/office/drawing/2014/main" id="{7E5C147E-56A3-5D83-EEC4-33A192902C91}"/>
               </a:ext>
             </a:extLst>
           </p:cNvPr>
@@ -3016,7 +3016,7 @@
           <a:bodyPr/>
           <a:lstStyle/>
           <a:p>
-            <a:fld id="{36A266F4-05BF-447F-9E94-21CBFC9CBEBB}" type="datetimeFigureOut">
+            <a:fld id="{AD8669CD-8760-48F0-845F-08D04249F900}" type="datetimeFigureOut">
               <a:rPr kumimoji="1" lang="ja-JP" altLang="en-US" smtClean="0"/>
               <a:t>2026/9/20</a:t>
             </a:fld>
@@ -3029,7 +3029,7 @@
           <p:cNvPr id="6" name="フッター プレースホルダー 5">
             <a:extLst>
               <a:ext uri="{FF2B5EF4-FFF2-40B4-BE49-F238E27FC236}">
-                <a16:creationId xmlns:a16="http://schemas.microsoft.com/office/drawing/2014/main" id="{AA498B1A-CB68-8E34-4195-605C2B679522}"/>
+                <a16:creationId xmlns:a16="http://schemas.microsoft.com/office/drawing/2014/main" id="{CDCDD0C0-4344-7519-356C-202803781A0D}"/>
               </a:ext>
             </a:extLst>
           </p:cNvPr>
@@ -3054,7 +3054,7 @@
           <p:cNvPr id="7" name="スライド番号プレースホルダー 6">
             <a:extLst>
               <a:ext uri="{FF2B5EF4-FFF2-40B4-BE49-F238E27FC236}">
-                <a16:creationId xmlns:a16="http://schemas.microsoft.com/office/drawing/2014/main" id="{9338F3DC-2C4A-5033-3C06-37ACD513D1AF}"/>
+                <a16:creationId xmlns:a16="http://schemas.microsoft.com/office/drawing/2014/main" id="{AAEF7FA5-4E63-1635-DAFC-708C04DCEE25}"/>
               </a:ext>
             </a:extLst>
           </p:cNvPr>
@@ -3070,7 +3070,7 @@
           <a:bodyPr/>
           <a:lstStyle/>
           <a:p>
-            <a:fld id="{EDBA39AF-BDDA-49E1-917F-24C239FCBFB9}" type="slidenum">
+            <a:fld id="{478D4EE2-F517-4E63-9D73-3B4AC98DE8A5}" type="slidenum">
               <a:rPr kumimoji="1" lang="ja-JP" altLang="en-US" smtClean="0"/>
               <a:t>‹#›</a:t>
             </a:fld>
@@ -3081,7 +3081,7 @@
     </p:spTree>
     <p:extLst>
       <p:ext uri="{BB962C8B-B14F-4D97-AF65-F5344CB8AC3E}">
-        <p14:creationId xmlns:p14="http://schemas.microsoft.com/office/powerpoint/2010/main" val="4276469004"/>
+        <p14:creationId xmlns:p14="http://schemas.microsoft.com/office/powerpoint/2010/main" val="4189990867"/>
       </p:ext>
     </p:extLst>
   </p:cSld>
@@ -3118,7 +3118,7 @@
           <p:cNvPr id="2" name="タイトル プレースホルダー 1">
             <a:extLst>
               <a:ext uri="{FF2B5EF4-FFF2-40B4-BE49-F238E27FC236}">
-                <a16:creationId xmlns:a16="http://schemas.microsoft.com/office/drawing/2014/main" id="{1391BB9D-96C5-D909-D18B-30AF66FCC1D5}"/>
+                <a16:creationId xmlns:a16="http://schemas.microsoft.com/office/drawing/2014/main" id="{1B29E173-F719-7464-CCF2-2E6700CD341C}"/>
               </a:ext>
             </a:extLst>
           </p:cNvPr>
@@ -3156,7 +3156,7 @@
           <p:cNvPr id="3" name="テキスト プレースホルダー 2">
             <a:extLst>
               <a:ext uri="{FF2B5EF4-FFF2-40B4-BE49-F238E27FC236}">
-                <a16:creationId xmlns:a16="http://schemas.microsoft.com/office/drawing/2014/main" id="{2D483537-C54F-B1C1-7A66-87BB305CD21F}"/>
+                <a16:creationId xmlns:a16="http://schemas.microsoft.com/office/drawing/2014/main" id="{DF1C82DD-37C0-0A5F-0640-A6A97998C2A8}"/>
               </a:ext>
             </a:extLst>
           </p:cNvPr>
@@ -3255,7 +3255,7 @@
           <p:cNvPr id="4" name="日付プレースホルダー 3">
             <a:extLst>
               <a:ext uri="{FF2B5EF4-FFF2-40B4-BE49-F238E27FC236}">
-                <a16:creationId xmlns:a16="http://schemas.microsoft.com/office/drawing/2014/main" id="{1376926C-DE53-920F-EFC2-F5FADD301699}"/>
+                <a16:creationId xmlns:a16="http://schemas.microsoft.com/office/drawing/2014/main" id="{5468D1FF-E2C8-0347-FC57-9F51F0B6376B}"/>
               </a:ext>
             </a:extLst>
           </p:cNvPr>
@@ -3289,7 +3289,7 @@
             </a:lvl1pPr>
           </a:lstStyle>
           <a:p>
-            <a:fld id="{36A266F4-05BF-447F-9E94-21CBFC9CBEBB}" type="datetimeFigureOut">
+            <a:fld id="{AD8669CD-8760-48F0-845F-08D04249F900}" type="datetimeFigureOut">
               <a:rPr kumimoji="1" lang="ja-JP" altLang="en-US" smtClean="0"/>
               <a:t>2026/9/20</a:t>
             </a:fld>
@@ -3302,7 +3302,7 @@
           <p:cNvPr id="5" name="フッター プレースホルダー 4">
             <a:extLst>
               <a:ext uri="{FF2B5EF4-FFF2-40B4-BE49-F238E27FC236}">
-                <a16:creationId xmlns:a16="http://schemas.microsoft.com/office/drawing/2014/main" id="{3AB49376-517B-59C4-8F9C-25CC6A03109C}"/>
+                <a16:creationId xmlns:a16="http://schemas.microsoft.com/office/drawing/2014/main" id="{8F76BDF0-2DF6-9598-EF58-E5D0C72539E9}"/>
               </a:ext>
             </a:extLst>
           </p:cNvPr>
@@ -3345,7 +3345,7 @@
           <p:cNvPr id="6" name="スライド番号プレースホルダー 5">
             <a:extLst>
               <a:ext uri="{FF2B5EF4-FFF2-40B4-BE49-F238E27FC236}">
-                <a16:creationId xmlns:a16="http://schemas.microsoft.com/office/drawing/2014/main" id="{3EF22CEA-1BFC-0C6C-74D9-7FE3E5BA6707}"/>
+                <a16:creationId xmlns:a16="http://schemas.microsoft.com/office/drawing/2014/main" id="{0E6A005E-86C8-1C3E-0A9C-0BDD90847F03}"/>
               </a:ext>
             </a:extLst>
           </p:cNvPr>
@@ -3379,7 +3379,7 @@
             </a:lvl1pPr>
           </a:lstStyle>
           <a:p>
-            <a:fld id="{EDBA39AF-BDDA-49E1-917F-24C239FCBFB9}" type="slidenum">
+            <a:fld id="{478D4EE2-F517-4E63-9D73-3B4AC98DE8A5}" type="slidenum">
               <a:rPr kumimoji="1" lang="ja-JP" altLang="en-US" smtClean="0"/>
               <a:t>‹#›</a:t>
             </a:fld>
@@ -3390,7 +3390,7 @@
     </p:spTree>
     <p:extLst>
       <p:ext uri="{BB962C8B-B14F-4D97-AF65-F5344CB8AC3E}">
-        <p14:creationId xmlns:p14="http://schemas.microsoft.com/office/powerpoint/2010/main" val="2350259893"/>
+        <p14:creationId xmlns:p14="http://schemas.microsoft.com/office/powerpoint/2010/main" val="3805206163"/>
       </p:ext>
     </p:extLst>
   </p:cSld>
@@ -3713,7 +3713,7 @@
           <p:cNvPr id="2" name="タイトル 1">
             <a:extLst>
               <a:ext uri="{FF2B5EF4-FFF2-40B4-BE49-F238E27FC236}">
-                <a16:creationId xmlns:a16="http://schemas.microsoft.com/office/drawing/2014/main" id="{30E5D5F6-960E-5EFC-42FB-0E45EB8CE116}"/>
+                <a16:creationId xmlns:a16="http://schemas.microsoft.com/office/drawing/2014/main" id="{96322F28-C017-22C9-14FA-BA74FE92DA6E}"/>
               </a:ext>
             </a:extLst>
           </p:cNvPr>
@@ -3748,7 +3748,7 @@
     </p:spTree>
     <p:extLst>
       <p:ext uri="{BB962C8B-B14F-4D97-AF65-F5344CB8AC3E}">
-        <p14:creationId xmlns:p14="http://schemas.microsoft.com/office/powerpoint/2010/main" val="2130840977"/>
+        <p14:creationId xmlns:p14="http://schemas.microsoft.com/office/powerpoint/2010/main" val="2685395034"/>
       </p:ext>
     </p:extLst>
   </p:cSld>
@@ -3780,7 +3780,7 @@
           <p:cNvPr id="2" name="タイトル 1">
             <a:extLst>
               <a:ext uri="{FF2B5EF4-FFF2-40B4-BE49-F238E27FC236}">
-                <a16:creationId xmlns:a16="http://schemas.microsoft.com/office/drawing/2014/main" id="{643AD349-926B-3A95-FA67-2F7CB6FAD3A2}"/>
+                <a16:creationId xmlns:a16="http://schemas.microsoft.com/office/drawing/2014/main" id="{0DF5352F-596D-170D-51AE-15670B56AE59}"/>
               </a:ext>
             </a:extLst>
           </p:cNvPr>
@@ -3815,7 +3815,7 @@
     </p:spTree>
     <p:extLst>
       <p:ext uri="{BB962C8B-B14F-4D97-AF65-F5344CB8AC3E}">
-        <p14:creationId xmlns:p14="http://schemas.microsoft.com/office/powerpoint/2010/main" val="3215897615"/>
+        <p14:creationId xmlns:p14="http://schemas.microsoft.com/office/powerpoint/2010/main" val="4224346527"/>
       </p:ext>
     </p:extLst>
   </p:cSld>
@@ -3847,7 +3847,7 @@
           <p:cNvPr id="2" name="タイトル 1">
             <a:extLst>
               <a:ext uri="{FF2B5EF4-FFF2-40B4-BE49-F238E27FC236}">
-                <a16:creationId xmlns:a16="http://schemas.microsoft.com/office/drawing/2014/main" id="{4415DE2B-B75C-E4F5-2ABA-DC081DE4F14F}"/>
+                <a16:creationId xmlns:a16="http://schemas.microsoft.com/office/drawing/2014/main" id="{397DDAEF-E04B-F70C-893B-9F5EC8DF070F}"/>
               </a:ext>
             </a:extLst>
           </p:cNvPr>
@@ -3877,7 +3877,7 @@
     </p:spTree>
     <p:extLst>
       <p:ext uri="{BB962C8B-B14F-4D97-AF65-F5344CB8AC3E}">
-        <p14:creationId xmlns:p14="http://schemas.microsoft.com/office/powerpoint/2010/main" val="555069869"/>
+        <p14:creationId xmlns:p14="http://schemas.microsoft.com/office/powerpoint/2010/main" val="4265043300"/>
       </p:ext>
     </p:extLst>
   </p:cSld>
@@ -3909,7 +3909,7 @@
           <p:cNvPr id="2" name="タイトル 1">
             <a:extLst>
               <a:ext uri="{FF2B5EF4-FFF2-40B4-BE49-F238E27FC236}">
-                <a16:creationId xmlns:a16="http://schemas.microsoft.com/office/drawing/2014/main" id="{934AF3D0-3F5B-6634-8F84-A86D7A729193}"/>
+                <a16:creationId xmlns:a16="http://schemas.microsoft.com/office/drawing/2014/main" id="{DD5C9BAD-6DE6-8222-0073-51525A3ACA8E}"/>
               </a:ext>
             </a:extLst>
           </p:cNvPr>
@@ -3944,7 +3944,7 @@
     </p:spTree>
     <p:extLst>
       <p:ext uri="{BB962C8B-B14F-4D97-AF65-F5344CB8AC3E}">
-        <p14:creationId xmlns:p14="http://schemas.microsoft.com/office/powerpoint/2010/main" val="2352172592"/>
+        <p14:creationId xmlns:p14="http://schemas.microsoft.com/office/powerpoint/2010/main" val="265368330"/>
       </p:ext>
     </p:extLst>
   </p:cSld>
@@ -3976,7 +3976,7 @@
           <p:cNvPr id="2" name="タイトル 1">
             <a:extLst>
               <a:ext uri="{FF2B5EF4-FFF2-40B4-BE49-F238E27FC236}">
-                <a16:creationId xmlns:a16="http://schemas.microsoft.com/office/drawing/2014/main" id="{46B1C568-CDA5-5361-FD0F-DEE9461EB5B6}"/>
+                <a16:creationId xmlns:a16="http://schemas.microsoft.com/office/drawing/2014/main" id="{6DECFCCA-EDC2-75C6-B582-AA63A145B786}"/>
               </a:ext>
             </a:extLst>
           </p:cNvPr>
@@ -4011,7 +4011,7 @@
     </p:spTree>
     <p:extLst>
       <p:ext uri="{BB962C8B-B14F-4D97-AF65-F5344CB8AC3E}">
-        <p14:creationId xmlns:p14="http://schemas.microsoft.com/office/powerpoint/2010/main" val="3385615299"/>
+        <p14:creationId xmlns:p14="http://schemas.microsoft.com/office/powerpoint/2010/main" val="973564069"/>
       </p:ext>
     </p:extLst>
   </p:cSld>
@@ -4043,7 +4043,7 @@
           <p:cNvPr id="2" name="タイトル 1">
             <a:extLst>
               <a:ext uri="{FF2B5EF4-FFF2-40B4-BE49-F238E27FC236}">
-                <a16:creationId xmlns:a16="http://schemas.microsoft.com/office/drawing/2014/main" id="{36B305FB-CE59-E10D-A996-44F93CEC718F}"/>
+                <a16:creationId xmlns:a16="http://schemas.microsoft.com/office/drawing/2014/main" id="{9EBA5A08-99ED-7659-0F10-91158887BDA0}"/>
               </a:ext>
             </a:extLst>
           </p:cNvPr>
@@ -4078,7 +4078,7 @@
     </p:spTree>
     <p:extLst>
       <p:ext uri="{BB962C8B-B14F-4D97-AF65-F5344CB8AC3E}">
-        <p14:creationId xmlns:p14="http://schemas.microsoft.com/office/powerpoint/2010/main" val="4265227045"/>
+        <p14:creationId xmlns:p14="http://schemas.microsoft.com/office/powerpoint/2010/main" val="2770209840"/>
       </p:ext>
     </p:extLst>
   </p:cSld>
@@ -4110,7 +4110,7 @@
           <p:cNvPr id="2" name="タイトル 1">
             <a:extLst>
               <a:ext uri="{FF2B5EF4-FFF2-40B4-BE49-F238E27FC236}">
-                <a16:creationId xmlns:a16="http://schemas.microsoft.com/office/drawing/2014/main" id="{2D953624-1664-33FC-49F2-E72807537574}"/>
+                <a16:creationId xmlns:a16="http://schemas.microsoft.com/office/drawing/2014/main" id="{357B4CD7-17CC-A7D8-855B-EB6A4F743199}"/>
               </a:ext>
             </a:extLst>
           </p:cNvPr>
@@ -4145,7 +4145,7 @@
     </p:spTree>
     <p:extLst>
       <p:ext uri="{BB962C8B-B14F-4D97-AF65-F5344CB8AC3E}">
-        <p14:creationId xmlns:p14="http://schemas.microsoft.com/office/powerpoint/2010/main" val="2774255295"/>
+        <p14:creationId xmlns:p14="http://schemas.microsoft.com/office/powerpoint/2010/main" val="802913191"/>
       </p:ext>
     </p:extLst>
   </p:cSld>
@@ -4177,7 +4177,7 @@
           <p:cNvPr id="2" name="タイトル 1">
             <a:extLst>
               <a:ext uri="{FF2B5EF4-FFF2-40B4-BE49-F238E27FC236}">
-                <a16:creationId xmlns:a16="http://schemas.microsoft.com/office/drawing/2014/main" id="{E05B431A-7C62-15E4-BB8C-1026D8566318}"/>
+                <a16:creationId xmlns:a16="http://schemas.microsoft.com/office/drawing/2014/main" id="{C1C42441-1B46-CECE-C095-37DCA9FF32BC}"/>
               </a:ext>
             </a:extLst>
           </p:cNvPr>
@@ -4212,7 +4212,7 @@
     </p:spTree>
     <p:extLst>
       <p:ext uri="{BB962C8B-B14F-4D97-AF65-F5344CB8AC3E}">
-        <p14:creationId xmlns:p14="http://schemas.microsoft.com/office/powerpoint/2010/main" val="4176202495"/>
+        <p14:creationId xmlns:p14="http://schemas.microsoft.com/office/powerpoint/2010/main" val="2307294435"/>
       </p:ext>
     </p:extLst>
   </p:cSld>
@@ -4244,7 +4244,7 @@
           <p:cNvPr id="2" name="タイトル 1">
             <a:extLst>
               <a:ext uri="{FF2B5EF4-FFF2-40B4-BE49-F238E27FC236}">
-                <a16:creationId xmlns:a16="http://schemas.microsoft.com/office/drawing/2014/main" id="{2724AF5C-9CDA-DAC9-E639-949F11F11EFA}"/>
+                <a16:creationId xmlns:a16="http://schemas.microsoft.com/office/drawing/2014/main" id="{E5BB6885-CC03-9A81-D28D-8C3D14ABECBD}"/>
               </a:ext>
             </a:extLst>
           </p:cNvPr>
@@ -4279,7 +4279,7 @@
     </p:spTree>
     <p:extLst>
       <p:ext uri="{BB962C8B-B14F-4D97-AF65-F5344CB8AC3E}">
-        <p14:creationId xmlns:p14="http://schemas.microsoft.com/office/powerpoint/2010/main" val="2452991650"/>
+        <p14:creationId xmlns:p14="http://schemas.microsoft.com/office/powerpoint/2010/main" val="921725398"/>
       </p:ext>
     </p:extLst>
   </p:cSld>
@@ -4311,7 +4311,7 @@
           <p:cNvPr id="2" name="タイトル 1">
             <a:extLst>
               <a:ext uri="{FF2B5EF4-FFF2-40B4-BE49-F238E27FC236}">
-                <a16:creationId xmlns:a16="http://schemas.microsoft.com/office/drawing/2014/main" id="{9675CE1D-72F7-EB8B-1ECC-6E49715DD02C}"/>
+                <a16:creationId xmlns:a16="http://schemas.microsoft.com/office/drawing/2014/main" id="{4B3514E1-D369-5D01-60B9-8299A85BD5C7}"/>
               </a:ext>
             </a:extLst>
           </p:cNvPr>
@@ -4346,7 +4346,7 @@
     </p:spTree>
     <p:extLst>
       <p:ext uri="{BB962C8B-B14F-4D97-AF65-F5344CB8AC3E}">
-        <p14:creationId xmlns:p14="http://schemas.microsoft.com/office/powerpoint/2010/main" val="4095577140"/>
+        <p14:creationId xmlns:p14="http://schemas.microsoft.com/office/powerpoint/2010/main" val="3629076654"/>
       </p:ext>
     </p:extLst>
   </p:cSld>
@@ -4378,7 +4378,7 @@
           <p:cNvPr id="2" name="タイトル 1">
             <a:extLst>
               <a:ext uri="{FF2B5EF4-FFF2-40B4-BE49-F238E27FC236}">
-                <a16:creationId xmlns:a16="http://schemas.microsoft.com/office/drawing/2014/main" id="{71C3A9C2-C20A-70E0-470F-9FFA8183AFEA}"/>
+                <a16:creationId xmlns:a16="http://schemas.microsoft.com/office/drawing/2014/main" id="{A9B54E2C-640F-B991-8F62-B471EE276B59}"/>
               </a:ext>
             </a:extLst>
           </p:cNvPr>
@@ -4413,7 +4413,7 @@
     </p:spTree>
     <p:extLst>
       <p:ext uri="{BB962C8B-B14F-4D97-AF65-F5344CB8AC3E}">
-        <p14:creationId xmlns:p14="http://schemas.microsoft.com/office/powerpoint/2010/main" val="3203268521"/>
+        <p14:creationId xmlns:p14="http://schemas.microsoft.com/office/powerpoint/2010/main" val="838652528"/>
       </p:ext>
     </p:extLst>
   </p:cSld>
@@ -4445,7 +4445,7 @@
           <p:cNvPr id="2" name="タイトル 1">
             <a:extLst>
               <a:ext uri="{FF2B5EF4-FFF2-40B4-BE49-F238E27FC236}">
-                <a16:creationId xmlns:a16="http://schemas.microsoft.com/office/drawing/2014/main" id="{B443F6B1-3BD1-085A-BA76-DA460B7CC291}"/>
+                <a16:creationId xmlns:a16="http://schemas.microsoft.com/office/drawing/2014/main" id="{488EFA12-FAF6-D2A2-8513-4229956268BC}"/>
               </a:ext>
             </a:extLst>
           </p:cNvPr>
@@ -4480,7 +4480,7 @@
     </p:spTree>
     <p:extLst>
       <p:ext uri="{BB962C8B-B14F-4D97-AF65-F5344CB8AC3E}">
-        <p14:creationId xmlns:p14="http://schemas.microsoft.com/office/powerpoint/2010/main" val="3505361064"/>
+        <p14:creationId xmlns:p14="http://schemas.microsoft.com/office/powerpoint/2010/main" val="1997409183"/>
       </p:ext>
     </p:extLst>
   </p:cSld>
@@ -4512,7 +4512,7 @@
           <p:cNvPr id="2" name="タイトル 1">
             <a:extLst>
               <a:ext uri="{FF2B5EF4-FFF2-40B4-BE49-F238E27FC236}">
-                <a16:creationId xmlns:a16="http://schemas.microsoft.com/office/drawing/2014/main" id="{6116DD33-36A9-C859-E5A3-413D7802CF65}"/>
+                <a16:creationId xmlns:a16="http://schemas.microsoft.com/office/drawing/2014/main" id="{F1DF3151-26EE-4DD3-08F0-44055C2BE575}"/>
               </a:ext>
             </a:extLst>
           </p:cNvPr>
@@ -4547,7 +4547,7 @@
     </p:spTree>
     <p:extLst>
       <p:ext uri="{BB962C8B-B14F-4D97-AF65-F5344CB8AC3E}">
-        <p14:creationId xmlns:p14="http://schemas.microsoft.com/office/powerpoint/2010/main" val="310165511"/>
+        <p14:creationId xmlns:p14="http://schemas.microsoft.com/office/powerpoint/2010/main" val="3634385146"/>
       </p:ext>
     </p:extLst>
   </p:cSld>
@@ -4579,7 +4579,7 @@
           <p:cNvPr id="2" name="タイトル 1">
             <a:extLst>
               <a:ext uri="{FF2B5EF4-FFF2-40B4-BE49-F238E27FC236}">
-                <a16:creationId xmlns:a16="http://schemas.microsoft.com/office/drawing/2014/main" id="{6E5E57C4-E985-F24F-D3F0-C8B1F60173ED}"/>
+                <a16:creationId xmlns:a16="http://schemas.microsoft.com/office/drawing/2014/main" id="{1C9EF0AC-3AE3-33BF-E12E-18CD314E79A1}"/>
               </a:ext>
             </a:extLst>
           </p:cNvPr>
@@ -4614,7 +4614,7 @@
     </p:spTree>
     <p:extLst>
       <p:ext uri="{BB962C8B-B14F-4D97-AF65-F5344CB8AC3E}">
-        <p14:creationId xmlns:p14="http://schemas.microsoft.com/office/powerpoint/2010/main" val="3425294994"/>
+        <p14:creationId xmlns:p14="http://schemas.microsoft.com/office/powerpoint/2010/main" val="1822508779"/>
       </p:ext>
     </p:extLst>
   </p:cSld>
@@ -4646,7 +4646,7 @@
           <p:cNvPr id="2" name="タイトル 1">
             <a:extLst>
               <a:ext uri="{FF2B5EF4-FFF2-40B4-BE49-F238E27FC236}">
-                <a16:creationId xmlns:a16="http://schemas.microsoft.com/office/drawing/2014/main" id="{E12A93C7-CB93-C57A-AF82-8B9885003134}"/>
+                <a16:creationId xmlns:a16="http://schemas.microsoft.com/office/drawing/2014/main" id="{68F9E21E-CA41-6AB6-4A40-16531AF111C2}"/>
               </a:ext>
             </a:extLst>
           </p:cNvPr>
@@ -4681,7 +4681,7 @@
     </p:spTree>
     <p:extLst>
       <p:ext uri="{BB962C8B-B14F-4D97-AF65-F5344CB8AC3E}">
-        <p14:creationId xmlns:p14="http://schemas.microsoft.com/office/powerpoint/2010/main" val="1299602220"/>
+        <p14:creationId xmlns:p14="http://schemas.microsoft.com/office/powerpoint/2010/main" val="804275932"/>
       </p:ext>
     </p:extLst>
   </p:cSld>
@@ -4713,7 +4713,7 @@
           <p:cNvPr id="2" name="タイトル 1">
             <a:extLst>
               <a:ext uri="{FF2B5EF4-FFF2-40B4-BE49-F238E27FC236}">
-                <a16:creationId xmlns:a16="http://schemas.microsoft.com/office/drawing/2014/main" id="{C073A438-74F4-A916-5C97-CD44207DB810}"/>
+                <a16:creationId xmlns:a16="http://schemas.microsoft.com/office/drawing/2014/main" id="{364FF947-D68F-9AC4-47A6-C402980E6E87}"/>
               </a:ext>
             </a:extLst>
           </p:cNvPr>
@@ -4748,7 +4748,7 @@
     </p:spTree>
     <p:extLst>
       <p:ext uri="{BB962C8B-B14F-4D97-AF65-F5344CB8AC3E}">
-        <p14:creationId xmlns:p14="http://schemas.microsoft.com/office/powerpoint/2010/main" val="35367338"/>
+        <p14:creationId xmlns:p14="http://schemas.microsoft.com/office/powerpoint/2010/main" val="2627513165"/>
       </p:ext>
     </p:extLst>
   </p:cSld>
@@ -4780,7 +4780,7 @@
           <p:cNvPr id="2" name="タイトル 1">
             <a:extLst>
               <a:ext uri="{FF2B5EF4-FFF2-40B4-BE49-F238E27FC236}">
-                <a16:creationId xmlns:a16="http://schemas.microsoft.com/office/drawing/2014/main" id="{8F17E4A4-4446-FD7E-9F60-23C82692BD37}"/>
+                <a16:creationId xmlns:a16="http://schemas.microsoft.com/office/drawing/2014/main" id="{D194360F-4A72-8291-3391-92E3CE403165}"/>
               </a:ext>
             </a:extLst>
           </p:cNvPr>
@@ -4815,7 +4815,7 @@
     </p:spTree>
     <p:extLst>
       <p:ext uri="{BB962C8B-B14F-4D97-AF65-F5344CB8AC3E}">
-        <p14:creationId xmlns:p14="http://schemas.microsoft.com/office/powerpoint/2010/main" val="2903777721"/>
+        <p14:creationId xmlns:p14="http://schemas.microsoft.com/office/powerpoint/2010/main" val="3992718941"/>
       </p:ext>
     </p:extLst>
   </p:cSld>
@@ -4847,7 +4847,7 @@
           <p:cNvPr id="2" name="タイトル 1">
             <a:extLst>
               <a:ext uri="{FF2B5EF4-FFF2-40B4-BE49-F238E27FC236}">
-                <a16:creationId xmlns:a16="http://schemas.microsoft.com/office/drawing/2014/main" id="{37D2BA81-CF7C-62B9-BFD7-840BE3CA1B24}"/>
+                <a16:creationId xmlns:a16="http://schemas.microsoft.com/office/drawing/2014/main" id="{4CC99B44-14E3-8454-67CB-2C10B7BA6140}"/>
               </a:ext>
             </a:extLst>
           </p:cNvPr>
@@ -4882,7 +4882,7 @@
     </p:spTree>
     <p:extLst>
       <p:ext uri="{BB962C8B-B14F-4D97-AF65-F5344CB8AC3E}">
-        <p14:creationId xmlns:p14="http://schemas.microsoft.com/office/powerpoint/2010/main" val="3200377920"/>
+        <p14:creationId xmlns:p14="http://schemas.microsoft.com/office/powerpoint/2010/main" val="3141127585"/>
       </p:ext>
     </p:extLst>
   </p:cSld>
@@ -4914,7 +4914,7 @@
           <p:cNvPr id="2" name="タイトル 1">
             <a:extLst>
               <a:ext uri="{FF2B5EF4-FFF2-40B4-BE49-F238E27FC236}">
-                <a16:creationId xmlns:a16="http://schemas.microsoft.com/office/drawing/2014/main" id="{62CB369E-A83D-5723-8688-ED3BDB8B0F6D}"/>
+                <a16:creationId xmlns:a16="http://schemas.microsoft.com/office/drawing/2014/main" id="{06704DE7-CE36-A108-2B0E-C9833DEFE191}"/>
               </a:ext>
             </a:extLst>
           </p:cNvPr>
@@ -4949,7 +4949,7 @@
     </p:spTree>
     <p:extLst>
       <p:ext uri="{BB962C8B-B14F-4D97-AF65-F5344CB8AC3E}">
-        <p14:creationId xmlns:p14="http://schemas.microsoft.com/office/powerpoint/2010/main" val="2742981017"/>
+        <p14:creationId xmlns:p14="http://schemas.microsoft.com/office/powerpoint/2010/main" val="1033405567"/>
       </p:ext>
     </p:extLst>
   </p:cSld>
@@ -4981,7 +4981,7 @@
           <p:cNvPr id="2" name="タイトル 1">
             <a:extLst>
               <a:ext uri="{FF2B5EF4-FFF2-40B4-BE49-F238E27FC236}">
-                <a16:creationId xmlns:a16="http://schemas.microsoft.com/office/drawing/2014/main" id="{B1B6F178-A955-EAAD-932C-73F4B962D5C1}"/>
+                <a16:creationId xmlns:a16="http://schemas.microsoft.com/office/drawing/2014/main" id="{95083623-FD23-1113-E0AF-845EABDD0045}"/>
               </a:ext>
             </a:extLst>
           </p:cNvPr>
@@ -5016,7 +5016,7 @@
     </p:spTree>
     <p:extLst>
       <p:ext uri="{BB962C8B-B14F-4D97-AF65-F5344CB8AC3E}">
-        <p14:creationId xmlns:p14="http://schemas.microsoft.com/office/powerpoint/2010/main" val="3648782694"/>
+        <p14:creationId xmlns:p14="http://schemas.microsoft.com/office/powerpoint/2010/main" val="566118589"/>
       </p:ext>
     </p:extLst>
   </p:cSld>
@@ -5048,7 +5048,7 @@
           <p:cNvPr id="2" name="タイトル 1">
             <a:extLst>
               <a:ext uri="{FF2B5EF4-FFF2-40B4-BE49-F238E27FC236}">
-                <a16:creationId xmlns:a16="http://schemas.microsoft.com/office/drawing/2014/main" id="{5A53EEC2-49AD-8CCE-C9F4-E9D613E15281}"/>
+                <a16:creationId xmlns:a16="http://schemas.microsoft.com/office/drawing/2014/main" id="{1C45F2E3-FFBE-640B-630F-CB75E723F4F0}"/>
               </a:ext>
             </a:extLst>
           </p:cNvPr>
@@ -5083,7 +5083,7 @@
     </p:spTree>
     <p:extLst>
       <p:ext uri="{BB962C8B-B14F-4D97-AF65-F5344CB8AC3E}">
-        <p14:creationId xmlns:p14="http://schemas.microsoft.com/office/powerpoint/2010/main" val="1589376010"/>
+        <p14:creationId xmlns:p14="http://schemas.microsoft.com/office/powerpoint/2010/main" val="689130674"/>
       </p:ext>
     </p:extLst>
   </p:cSld>
@@ -5115,7 +5115,7 @@
           <p:cNvPr id="2" name="タイトル 1">
             <a:extLst>
               <a:ext uri="{FF2B5EF4-FFF2-40B4-BE49-F238E27FC236}">
-                <a16:creationId xmlns:a16="http://schemas.microsoft.com/office/drawing/2014/main" id="{4919B000-516A-C33F-0135-FE09B6695F41}"/>
+                <a16:creationId xmlns:a16="http://schemas.microsoft.com/office/drawing/2014/main" id="{C91DFFDE-08FD-19EA-752F-11EAE7FA9B98}"/>
               </a:ext>
             </a:extLst>
           </p:cNvPr>
@@ -5150,7 +5150,7 @@
     </p:spTree>
     <p:extLst>
       <p:ext uri="{BB962C8B-B14F-4D97-AF65-F5344CB8AC3E}">
-        <p14:creationId xmlns:p14="http://schemas.microsoft.com/office/powerpoint/2010/main" val="2049619633"/>
+        <p14:creationId xmlns:p14="http://schemas.microsoft.com/office/powerpoint/2010/main" val="4153844303"/>
       </p:ext>
     </p:extLst>
   </p:cSld>
@@ -5182,7 +5182,7 @@
           <p:cNvPr id="2" name="タイトル 1">
             <a:extLst>
               <a:ext uri="{FF2B5EF4-FFF2-40B4-BE49-F238E27FC236}">
-                <a16:creationId xmlns:a16="http://schemas.microsoft.com/office/drawing/2014/main" id="{DA93BF5E-1BDD-DF4A-7963-9746CBAB99D8}"/>
+                <a16:creationId xmlns:a16="http://schemas.microsoft.com/office/drawing/2014/main" id="{1262B8C7-D66C-9AE0-265F-88EA1B6E5BA7}"/>
               </a:ext>
             </a:extLst>
           </p:cNvPr>
@@ -5217,7 +5217,7 @@
     </p:spTree>
     <p:extLst>
       <p:ext uri="{BB962C8B-B14F-4D97-AF65-F5344CB8AC3E}">
-        <p14:creationId xmlns:p14="http://schemas.microsoft.com/office/powerpoint/2010/main" val="1700670767"/>
+        <p14:creationId xmlns:p14="http://schemas.microsoft.com/office/powerpoint/2010/main" val="3986984981"/>
       </p:ext>
     </p:extLst>
   </p:cSld>
@@ -5249,7 +5249,7 @@
           <p:cNvPr id="2" name="タイトル 1">
             <a:extLst>
               <a:ext uri="{FF2B5EF4-FFF2-40B4-BE49-F238E27FC236}">
-                <a16:creationId xmlns:a16="http://schemas.microsoft.com/office/drawing/2014/main" id="{87A012A6-33B1-A891-EE98-2B5726C51D39}"/>
+                <a16:creationId xmlns:a16="http://schemas.microsoft.com/office/drawing/2014/main" id="{1B18CFDE-CB64-36B4-A903-5C0AB590E21C}"/>
               </a:ext>
             </a:extLst>
           </p:cNvPr>
@@ -5284,7 +5284,7 @@
     </p:spTree>
     <p:extLst>
       <p:ext uri="{BB962C8B-B14F-4D97-AF65-F5344CB8AC3E}">
-        <p14:creationId xmlns:p14="http://schemas.microsoft.com/office/powerpoint/2010/main" val="1714020615"/>
+        <p14:creationId xmlns:p14="http://schemas.microsoft.com/office/powerpoint/2010/main" val="254453389"/>
       </p:ext>
     </p:extLst>
   </p:cSld>
@@ -5316,7 +5316,7 @@
           <p:cNvPr id="2" name="タイトル 1">
             <a:extLst>
               <a:ext uri="{FF2B5EF4-FFF2-40B4-BE49-F238E27FC236}">
-                <a16:creationId xmlns:a16="http://schemas.microsoft.com/office/drawing/2014/main" id="{5E5E5FEB-4FCD-4495-B3C3-67FBCA7EE2D8}"/>
+                <a16:creationId xmlns:a16="http://schemas.microsoft.com/office/drawing/2014/main" id="{F14D658C-0F71-3364-4092-8093A6DDA7A1}"/>
               </a:ext>
             </a:extLst>
           </p:cNvPr>
@@ -5351,7 +5351,7 @@
     </p:spTree>
     <p:extLst>
       <p:ext uri="{BB962C8B-B14F-4D97-AF65-F5344CB8AC3E}">
-        <p14:creationId xmlns:p14="http://schemas.microsoft.com/office/powerpoint/2010/main" val="1760060643"/>
+        <p14:creationId xmlns:p14="http://schemas.microsoft.com/office/powerpoint/2010/main" val="814705808"/>
       </p:ext>
     </p:extLst>
   </p:cSld>
@@ -5383,7 +5383,7 @@
           <p:cNvPr id="2" name="タイトル 1">
             <a:extLst>
               <a:ext uri="{FF2B5EF4-FFF2-40B4-BE49-F238E27FC236}">
-                <a16:creationId xmlns:a16="http://schemas.microsoft.com/office/drawing/2014/main" id="{6CF866AD-3954-A9E5-1609-1C87E7C8248D}"/>
+                <a16:creationId xmlns:a16="http://schemas.microsoft.com/office/drawing/2014/main" id="{601D8091-343E-00E6-5BA0-3CF1387D366A}"/>
               </a:ext>
             </a:extLst>
           </p:cNvPr>
@@ -5418,7 +5418,7 @@
     </p:spTree>
     <p:extLst>
       <p:ext uri="{BB962C8B-B14F-4D97-AF65-F5344CB8AC3E}">
-        <p14:creationId xmlns:p14="http://schemas.microsoft.com/office/powerpoint/2010/main" val="3646293453"/>
+        <p14:creationId xmlns:p14="http://schemas.microsoft.com/office/powerpoint/2010/main" val="2108761838"/>
       </p:ext>
     </p:extLst>
   </p:cSld>
@@ -5450,7 +5450,7 @@
           <p:cNvPr id="2" name="タイトル 1">
             <a:extLst>
               <a:ext uri="{FF2B5EF4-FFF2-40B4-BE49-F238E27FC236}">
-                <a16:creationId xmlns:a16="http://schemas.microsoft.com/office/drawing/2014/main" id="{90290336-B01F-DCD4-4530-C0974C085870}"/>
+                <a16:creationId xmlns:a16="http://schemas.microsoft.com/office/drawing/2014/main" id="{CDD694B1-F622-D6A2-2968-17E1CAFA5FAF}"/>
               </a:ext>
             </a:extLst>
           </p:cNvPr>
@@ -5485,7 +5485,7 @@
     </p:spTree>
     <p:extLst>
       <p:ext uri="{BB962C8B-B14F-4D97-AF65-F5344CB8AC3E}">
-        <p14:creationId xmlns:p14="http://schemas.microsoft.com/office/powerpoint/2010/main" val="3850442289"/>
+        <p14:creationId xmlns:p14="http://schemas.microsoft.com/office/powerpoint/2010/main" val="3088828342"/>
       </p:ext>
     </p:extLst>
   </p:cSld>
@@ -5517,7 +5517,7 @@
           <p:cNvPr id="2" name="タイトル 1">
             <a:extLst>
               <a:ext uri="{FF2B5EF4-FFF2-40B4-BE49-F238E27FC236}">
-                <a16:creationId xmlns:a16="http://schemas.microsoft.com/office/drawing/2014/main" id="{4D2778C8-E913-E3BE-39FE-7EB384147C78}"/>
+                <a16:creationId xmlns:a16="http://schemas.microsoft.com/office/drawing/2014/main" id="{C3D0FD53-DC5F-80AF-8436-FD6848C222D6}"/>
               </a:ext>
             </a:extLst>
           </p:cNvPr>
@@ -5552,7 +5552,7 @@
     </p:spTree>
     <p:extLst>
       <p:ext uri="{BB962C8B-B14F-4D97-AF65-F5344CB8AC3E}">
-        <p14:creationId xmlns:p14="http://schemas.microsoft.com/office/powerpoint/2010/main" val="3122538319"/>
+        <p14:creationId xmlns:p14="http://schemas.microsoft.com/office/powerpoint/2010/main" val="3518507793"/>
       </p:ext>
     </p:extLst>
   </p:cSld>
@@ -5584,7 +5584,7 @@
           <p:cNvPr id="2" name="タイトル 1">
             <a:extLst>
               <a:ext uri="{FF2B5EF4-FFF2-40B4-BE49-F238E27FC236}">
-                <a16:creationId xmlns:a16="http://schemas.microsoft.com/office/drawing/2014/main" id="{3243F582-252E-C516-7C7A-C9D857EC9E63}"/>
+                <a16:creationId xmlns:a16="http://schemas.microsoft.com/office/drawing/2014/main" id="{D8BF94C7-B943-629A-BFE0-1339FB0656F7}"/>
               </a:ext>
             </a:extLst>
           </p:cNvPr>
@@ -5619,7 +5619,7 @@
     </p:spTree>
     <p:extLst>
       <p:ext uri="{BB962C8B-B14F-4D97-AF65-F5344CB8AC3E}">
-        <p14:creationId xmlns:p14="http://schemas.microsoft.com/office/powerpoint/2010/main" val="4160680909"/>
+        <p14:creationId xmlns:p14="http://schemas.microsoft.com/office/powerpoint/2010/main" val="740976346"/>
       </p:ext>
     </p:extLst>
   </p:cSld>
@@ -5651,7 +5651,7 @@
           <p:cNvPr id="2" name="タイトル 1">
             <a:extLst>
               <a:ext uri="{FF2B5EF4-FFF2-40B4-BE49-F238E27FC236}">
-                <a16:creationId xmlns:a16="http://schemas.microsoft.com/office/drawing/2014/main" id="{48ADE747-8D38-4296-2100-8B5081568FD2}"/>
+                <a16:creationId xmlns:a16="http://schemas.microsoft.com/office/drawing/2014/main" id="{F603367A-D879-DFE5-2B79-86A4BB0CD5F2}"/>
               </a:ext>
             </a:extLst>
           </p:cNvPr>
@@ -5686,7 +5686,7 @@
     </p:spTree>
     <p:extLst>
       <p:ext uri="{BB962C8B-B14F-4D97-AF65-F5344CB8AC3E}">
-        <p14:creationId xmlns:p14="http://schemas.microsoft.com/office/powerpoint/2010/main" val="1870913129"/>
+        <p14:creationId xmlns:p14="http://schemas.microsoft.com/office/powerpoint/2010/main" val="1498081404"/>
       </p:ext>
     </p:extLst>
   </p:cSld>
@@ -5718,7 +5718,7 @@
           <p:cNvPr id="2" name="タイトル 1">
             <a:extLst>
               <a:ext uri="{FF2B5EF4-FFF2-40B4-BE49-F238E27FC236}">
-                <a16:creationId xmlns:a16="http://schemas.microsoft.com/office/drawing/2014/main" id="{D4162FA5-8936-00EF-6560-56098611C66B}"/>
+                <a16:creationId xmlns:a16="http://schemas.microsoft.com/office/drawing/2014/main" id="{6142B417-A95C-1192-986C-72FA3CFA2365}"/>
               </a:ext>
             </a:extLst>
           </p:cNvPr>
@@ -5753,7 +5753,7 @@
     </p:spTree>
     <p:extLst>
       <p:ext uri="{BB962C8B-B14F-4D97-AF65-F5344CB8AC3E}">
-        <p14:creationId xmlns:p14="http://schemas.microsoft.com/office/powerpoint/2010/main" val="3877451744"/>
+        <p14:creationId xmlns:p14="http://schemas.microsoft.com/office/powerpoint/2010/main" val="2357913529"/>
       </p:ext>
     </p:extLst>
   </p:cSld>
@@ -5785,7 +5785,7 @@
           <p:cNvPr id="2" name="タイトル 1">
             <a:extLst>
               <a:ext uri="{FF2B5EF4-FFF2-40B4-BE49-F238E27FC236}">
-                <a16:creationId xmlns:a16="http://schemas.microsoft.com/office/drawing/2014/main" id="{E8BA7774-D626-2D13-5D60-7CC67548A8C6}"/>
+                <a16:creationId xmlns:a16="http://schemas.microsoft.com/office/drawing/2014/main" id="{477370BD-1B0B-0BBB-F1AD-7114AD294E1A}"/>
               </a:ext>
             </a:extLst>
           </p:cNvPr>
@@ -5820,7 +5820,7 @@
     </p:spTree>
     <p:extLst>
       <p:ext uri="{BB962C8B-B14F-4D97-AF65-F5344CB8AC3E}">
-        <p14:creationId xmlns:p14="http://schemas.microsoft.com/office/powerpoint/2010/main" val="3981918989"/>
+        <p14:creationId xmlns:p14="http://schemas.microsoft.com/office/powerpoint/2010/main" val="1083061250"/>
       </p:ext>
     </p:extLst>
   </p:cSld>
@@ -5852,7 +5852,7 @@
           <p:cNvPr id="2" name="タイトル 1">
             <a:extLst>
               <a:ext uri="{FF2B5EF4-FFF2-40B4-BE49-F238E27FC236}">
-                <a16:creationId xmlns:a16="http://schemas.microsoft.com/office/drawing/2014/main" id="{8A73E8F5-840B-1657-03AC-1AFF425F8977}"/>
+                <a16:creationId xmlns:a16="http://schemas.microsoft.com/office/drawing/2014/main" id="{25F13DFA-8503-3496-2519-C883460D1B16}"/>
               </a:ext>
             </a:extLst>
           </p:cNvPr>
@@ -5887,7 +5887,7 @@
     </p:spTree>
     <p:extLst>
       <p:ext uri="{BB962C8B-B14F-4D97-AF65-F5344CB8AC3E}">
-        <p14:creationId xmlns:p14="http://schemas.microsoft.com/office/powerpoint/2010/main" val="2853410841"/>
+        <p14:creationId xmlns:p14="http://schemas.microsoft.com/office/powerpoint/2010/main" val="1094701630"/>
       </p:ext>
     </p:extLst>
   </p:cSld>
@@ -5919,7 +5919,7 @@
           <p:cNvPr id="2" name="タイトル 1">
             <a:extLst>
               <a:ext uri="{FF2B5EF4-FFF2-40B4-BE49-F238E27FC236}">
-                <a16:creationId xmlns:a16="http://schemas.microsoft.com/office/drawing/2014/main" id="{FE0AE72D-0636-B15A-046B-78FD88A18D60}"/>
+                <a16:creationId xmlns:a16="http://schemas.microsoft.com/office/drawing/2014/main" id="{05F2C73D-E177-E045-0FCB-0D7B4D9D2C23}"/>
               </a:ext>
             </a:extLst>
           </p:cNvPr>
@@ -5954,7 +5954,7 @@
     </p:spTree>
     <p:extLst>
       <p:ext uri="{BB962C8B-B14F-4D97-AF65-F5344CB8AC3E}">
-        <p14:creationId xmlns:p14="http://schemas.microsoft.com/office/powerpoint/2010/main" val="3848197674"/>
+        <p14:creationId xmlns:p14="http://schemas.microsoft.com/office/powerpoint/2010/main" val="288069204"/>
       </p:ext>
     </p:extLst>
   </p:cSld>
@@ -5986,7 +5986,7 @@
           <p:cNvPr id="2" name="タイトル 1">
             <a:extLst>
               <a:ext uri="{FF2B5EF4-FFF2-40B4-BE49-F238E27FC236}">
-                <a16:creationId xmlns:a16="http://schemas.microsoft.com/office/drawing/2014/main" id="{252B8880-DCCF-857B-5484-74437AA5B047}"/>
+                <a16:creationId xmlns:a16="http://schemas.microsoft.com/office/drawing/2014/main" id="{8636982A-90C7-6118-BF4A-BE075A4091E9}"/>
               </a:ext>
             </a:extLst>
           </p:cNvPr>
@@ -6021,7 +6021,7 @@
     </p:spTree>
     <p:extLst>
       <p:ext uri="{BB962C8B-B14F-4D97-AF65-F5344CB8AC3E}">
-        <p14:creationId xmlns:p14="http://schemas.microsoft.com/office/powerpoint/2010/main" val="1903930919"/>
+        <p14:creationId xmlns:p14="http://schemas.microsoft.com/office/powerpoint/2010/main" val="2407428941"/>
       </p:ext>
     </p:extLst>
   </p:cSld>
@@ -6053,7 +6053,7 @@
           <p:cNvPr id="2" name="タイトル 1">
             <a:extLst>
               <a:ext uri="{FF2B5EF4-FFF2-40B4-BE49-F238E27FC236}">
-                <a16:creationId xmlns:a16="http://schemas.microsoft.com/office/drawing/2014/main" id="{EB69FF31-A989-0BD5-DA5C-ADA17EE4F177}"/>
+                <a16:creationId xmlns:a16="http://schemas.microsoft.com/office/drawing/2014/main" id="{25FC835E-E8F8-E776-CF78-30ACB9F0557B}"/>
               </a:ext>
             </a:extLst>
           </p:cNvPr>
@@ -6088,7 +6088,7 @@
     </p:spTree>
     <p:extLst>
       <p:ext uri="{BB962C8B-B14F-4D97-AF65-F5344CB8AC3E}">
-        <p14:creationId xmlns:p14="http://schemas.microsoft.com/office/powerpoint/2010/main" val="761028534"/>
+        <p14:creationId xmlns:p14="http://schemas.microsoft.com/office/powerpoint/2010/main" val="3545757945"/>
       </p:ext>
     </p:extLst>
   </p:cSld>
@@ -6120,7 +6120,7 @@
           <p:cNvPr id="2" name="タイトル 1">
             <a:extLst>
               <a:ext uri="{FF2B5EF4-FFF2-40B4-BE49-F238E27FC236}">
-                <a16:creationId xmlns:a16="http://schemas.microsoft.com/office/drawing/2014/main" id="{E305D90C-66EF-EAA3-57D1-023BE8A71DA4}"/>
+                <a16:creationId xmlns:a16="http://schemas.microsoft.com/office/drawing/2014/main" id="{6F962B2F-A6C5-1452-E123-132ED9E20AFD}"/>
               </a:ext>
             </a:extLst>
           </p:cNvPr>
@@ -6155,7 +6155,7 @@
     </p:spTree>
     <p:extLst>
       <p:ext uri="{BB962C8B-B14F-4D97-AF65-F5344CB8AC3E}">
-        <p14:creationId xmlns:p14="http://schemas.microsoft.com/office/powerpoint/2010/main" val="1592704423"/>
+        <p14:creationId xmlns:p14="http://schemas.microsoft.com/office/powerpoint/2010/main" val="992954194"/>
       </p:ext>
     </p:extLst>
   </p:cSld>
@@ -6187,7 +6187,7 @@
           <p:cNvPr id="2" name="タイトル 1">
             <a:extLst>
               <a:ext uri="{FF2B5EF4-FFF2-40B4-BE49-F238E27FC236}">
-                <a16:creationId xmlns:a16="http://schemas.microsoft.com/office/drawing/2014/main" id="{3CE0FF4B-8A8A-E552-CE6E-0F93646FB00F}"/>
+                <a16:creationId xmlns:a16="http://schemas.microsoft.com/office/drawing/2014/main" id="{45A4414A-84BE-96FD-F022-27A2B51B6246}"/>
               </a:ext>
             </a:extLst>
           </p:cNvPr>
@@ -6222,7 +6222,7 @@
     </p:spTree>
     <p:extLst>
       <p:ext uri="{BB962C8B-B14F-4D97-AF65-F5344CB8AC3E}">
-        <p14:creationId xmlns:p14="http://schemas.microsoft.com/office/powerpoint/2010/main" val="139982627"/>
+        <p14:creationId xmlns:p14="http://schemas.microsoft.com/office/powerpoint/2010/main" val="2000835414"/>
       </p:ext>
     </p:extLst>
   </p:cSld>
@@ -6254,7 +6254,7 @@
           <p:cNvPr id="2" name="タイトル 1">
             <a:extLst>
               <a:ext uri="{FF2B5EF4-FFF2-40B4-BE49-F238E27FC236}">
-                <a16:creationId xmlns:a16="http://schemas.microsoft.com/office/drawing/2014/main" id="{1276A761-73BE-ACBC-EC74-22089AA55CA0}"/>
+                <a16:creationId xmlns:a16="http://schemas.microsoft.com/office/drawing/2014/main" id="{89B428FE-856F-61F0-0C4B-15CB65F60D7E}"/>
               </a:ext>
             </a:extLst>
           </p:cNvPr>
@@ -6289,7 +6289,7 @@
     </p:spTree>
     <p:extLst>
       <p:ext uri="{BB962C8B-B14F-4D97-AF65-F5344CB8AC3E}">
-        <p14:creationId xmlns:p14="http://schemas.microsoft.com/office/powerpoint/2010/main" val="3016050558"/>
+        <p14:creationId xmlns:p14="http://schemas.microsoft.com/office/powerpoint/2010/main" val="2174785714"/>
       </p:ext>
     </p:extLst>
   </p:cSld>
@@ -6321,7 +6321,7 @@
           <p:cNvPr id="2" name="タイトル 1">
             <a:extLst>
               <a:ext uri="{FF2B5EF4-FFF2-40B4-BE49-F238E27FC236}">
-                <a16:creationId xmlns:a16="http://schemas.microsoft.com/office/drawing/2014/main" id="{B2A73993-698F-E19D-0EDC-0E81D8CB91E8}"/>
+                <a16:creationId xmlns:a16="http://schemas.microsoft.com/office/drawing/2014/main" id="{82175CFD-688F-23C1-ECA0-68F5F051F5C5}"/>
               </a:ext>
             </a:extLst>
           </p:cNvPr>
@@ -6356,7 +6356,7 @@
     </p:spTree>
     <p:extLst>
       <p:ext uri="{BB962C8B-B14F-4D97-AF65-F5344CB8AC3E}">
-        <p14:creationId xmlns:p14="http://schemas.microsoft.com/office/powerpoint/2010/main" val="249495250"/>
+        <p14:creationId xmlns:p14="http://schemas.microsoft.com/office/powerpoint/2010/main" val="3223935558"/>
       </p:ext>
     </p:extLst>
   </p:cSld>
@@ -6388,7 +6388,7 @@
           <p:cNvPr id="2" name="タイトル 1">
             <a:extLst>
               <a:ext uri="{FF2B5EF4-FFF2-40B4-BE49-F238E27FC236}">
-                <a16:creationId xmlns:a16="http://schemas.microsoft.com/office/drawing/2014/main" id="{43BCDEC8-7326-94C2-E2AE-453C0EF7F118}"/>
+                <a16:creationId xmlns:a16="http://schemas.microsoft.com/office/drawing/2014/main" id="{4C6264AF-8B8C-A753-4F98-ED4E7B599C60}"/>
               </a:ext>
             </a:extLst>
           </p:cNvPr>
@@ -6423,7 +6423,7 @@
     </p:spTree>
     <p:extLst>
       <p:ext uri="{BB962C8B-B14F-4D97-AF65-F5344CB8AC3E}">
-        <p14:creationId xmlns:p14="http://schemas.microsoft.com/office/powerpoint/2010/main" val="2714478328"/>
+        <p14:creationId xmlns:p14="http://schemas.microsoft.com/office/powerpoint/2010/main" val="1303023603"/>
       </p:ext>
     </p:extLst>
   </p:cSld>
@@ -6455,7 +6455,7 @@
           <p:cNvPr id="2" name="タイトル 1">
             <a:extLst>
               <a:ext uri="{FF2B5EF4-FFF2-40B4-BE49-F238E27FC236}">
-                <a16:creationId xmlns:a16="http://schemas.microsoft.com/office/drawing/2014/main" id="{09F185D5-9C0D-A255-453A-CB20014FCD97}"/>
+                <a16:creationId xmlns:a16="http://schemas.microsoft.com/office/drawing/2014/main" id="{79189915-4ADD-D5E3-E080-E0B02FF9EF9C}"/>
               </a:ext>
             </a:extLst>
           </p:cNvPr>
@@ -6490,7 +6490,7 @@
     </p:spTree>
     <p:extLst>
       <p:ext uri="{BB962C8B-B14F-4D97-AF65-F5344CB8AC3E}">
-        <p14:creationId xmlns:p14="http://schemas.microsoft.com/office/powerpoint/2010/main" val="2042593045"/>
+        <p14:creationId xmlns:p14="http://schemas.microsoft.com/office/powerpoint/2010/main" val="2849624967"/>
       </p:ext>
     </p:extLst>
   </p:cSld>
@@ -6522,7 +6522,7 @@
           <p:cNvPr id="2" name="タイトル 1">
             <a:extLst>
               <a:ext uri="{FF2B5EF4-FFF2-40B4-BE49-F238E27FC236}">
-                <a16:creationId xmlns:a16="http://schemas.microsoft.com/office/drawing/2014/main" id="{3E778EB7-674C-A1FE-0BEE-2D32B6C495A6}"/>
+                <a16:creationId xmlns:a16="http://schemas.microsoft.com/office/drawing/2014/main" id="{27F8CCE7-96E2-CD3E-0BBC-C4720C1C4E72}"/>
               </a:ext>
             </a:extLst>
           </p:cNvPr>
@@ -6557,7 +6557,7 @@
     </p:spTree>
     <p:extLst>
       <p:ext uri="{BB962C8B-B14F-4D97-AF65-F5344CB8AC3E}">
-        <p14:creationId xmlns:p14="http://schemas.microsoft.com/office/powerpoint/2010/main" val="948664550"/>
+        <p14:creationId xmlns:p14="http://schemas.microsoft.com/office/powerpoint/2010/main" val="3359392285"/>
       </p:ext>
     </p:extLst>
   </p:cSld>
@@ -6589,7 +6589,7 @@
           <p:cNvPr id="2" name="タイトル 1">
             <a:extLst>
               <a:ext uri="{FF2B5EF4-FFF2-40B4-BE49-F238E27FC236}">
-                <a16:creationId xmlns:a16="http://schemas.microsoft.com/office/drawing/2014/main" id="{E32E394C-4CA5-982A-8272-CDF1027C9E0C}"/>
+                <a16:creationId xmlns:a16="http://schemas.microsoft.com/office/drawing/2014/main" id="{44463704-5DFC-AC69-4980-C48F10469CC4}"/>
               </a:ext>
             </a:extLst>
           </p:cNvPr>
@@ -6624,7 +6624,7 @@
     </p:spTree>
     <p:extLst>
       <p:ext uri="{BB962C8B-B14F-4D97-AF65-F5344CB8AC3E}">
-        <p14:creationId xmlns:p14="http://schemas.microsoft.com/office/powerpoint/2010/main" val="1269419902"/>
+        <p14:creationId xmlns:p14="http://schemas.microsoft.com/office/powerpoint/2010/main" val="2103109354"/>
       </p:ext>
     </p:extLst>
   </p:cSld>
@@ -6656,7 +6656,7 @@
           <p:cNvPr id="2" name="タイトル 1">
             <a:extLst>
               <a:ext uri="{FF2B5EF4-FFF2-40B4-BE49-F238E27FC236}">
-                <a16:creationId xmlns:a16="http://schemas.microsoft.com/office/drawing/2014/main" id="{8B9AA0DA-7B52-ACB7-C7F9-9984976E734A}"/>
+                <a16:creationId xmlns:a16="http://schemas.microsoft.com/office/drawing/2014/main" id="{828E0664-8048-0879-C6E6-3840AC76FD6A}"/>
               </a:ext>
             </a:extLst>
           </p:cNvPr>
@@ -6691,7 +6691,7 @@
     </p:spTree>
     <p:extLst>
       <p:ext uri="{BB962C8B-B14F-4D97-AF65-F5344CB8AC3E}">
-        <p14:creationId xmlns:p14="http://schemas.microsoft.com/office/powerpoint/2010/main" val="1257471705"/>
+        <p14:creationId xmlns:p14="http://schemas.microsoft.com/office/powerpoint/2010/main" val="3306966524"/>
       </p:ext>
     </p:extLst>
   </p:cSld>
@@ -6723,7 +6723,7 @@
           <p:cNvPr id="2" name="タイトル 1">
             <a:extLst>
               <a:ext uri="{FF2B5EF4-FFF2-40B4-BE49-F238E27FC236}">
-                <a16:creationId xmlns:a16="http://schemas.microsoft.com/office/drawing/2014/main" id="{D12535A8-8E0E-94E4-9867-6EA0F102F0C7}"/>
+                <a16:creationId xmlns:a16="http://schemas.microsoft.com/office/drawing/2014/main" id="{0A1C68DD-C75C-ECD1-C80F-5C06103E8C2F}"/>
               </a:ext>
             </a:extLst>
           </p:cNvPr>
@@ -6758,7 +6758,7 @@
     </p:spTree>
     <p:extLst>
       <p:ext uri="{BB962C8B-B14F-4D97-AF65-F5344CB8AC3E}">
-        <p14:creationId xmlns:p14="http://schemas.microsoft.com/office/powerpoint/2010/main" val="79436987"/>
+        <p14:creationId xmlns:p14="http://schemas.microsoft.com/office/powerpoint/2010/main" val="3361266928"/>
       </p:ext>
     </p:extLst>
   </p:cSld>
@@ -6790,7 +6790,7 @@
           <p:cNvPr id="2" name="タイトル 1">
             <a:extLst>
               <a:ext uri="{FF2B5EF4-FFF2-40B4-BE49-F238E27FC236}">
-                <a16:creationId xmlns:a16="http://schemas.microsoft.com/office/drawing/2014/main" id="{F7E1E4D2-FE32-4FA7-5184-46B0185D2317}"/>
+                <a16:creationId xmlns:a16="http://schemas.microsoft.com/office/drawing/2014/main" id="{0887F2C6-07FF-57C1-2DB7-40A7F3A9421E}"/>
               </a:ext>
             </a:extLst>
           </p:cNvPr>
@@ -6825,7 +6825,7 @@
     </p:spTree>
     <p:extLst>
       <p:ext uri="{BB962C8B-B14F-4D97-AF65-F5344CB8AC3E}">
-        <p14:creationId xmlns:p14="http://schemas.microsoft.com/office/powerpoint/2010/main" val="2419393507"/>
+        <p14:creationId xmlns:p14="http://schemas.microsoft.com/office/powerpoint/2010/main" val="396669021"/>
       </p:ext>
     </p:extLst>
   </p:cSld>
@@ -6857,7 +6857,7 @@
           <p:cNvPr id="2" name="タイトル 1">
             <a:extLst>
               <a:ext uri="{FF2B5EF4-FFF2-40B4-BE49-F238E27FC236}">
-                <a16:creationId xmlns:a16="http://schemas.microsoft.com/office/drawing/2014/main" id="{385B9548-1CED-70AA-C24C-691E3D9E5E2F}"/>
+                <a16:creationId xmlns:a16="http://schemas.microsoft.com/office/drawing/2014/main" id="{122BC09E-5CCA-A98C-0A96-7A8B6E458941}"/>
               </a:ext>
             </a:extLst>
           </p:cNvPr>
@@ -6892,7 +6892,7 @@
     </p:spTree>
     <p:extLst>
       <p:ext uri="{BB962C8B-B14F-4D97-AF65-F5344CB8AC3E}">
-        <p14:creationId xmlns:p14="http://schemas.microsoft.com/office/powerpoint/2010/main" val="894074542"/>
+        <p14:creationId xmlns:p14="http://schemas.microsoft.com/office/powerpoint/2010/main" val="1729123728"/>
       </p:ext>
     </p:extLst>
   </p:cSld>
@@ -6924,7 +6924,7 @@
           <p:cNvPr id="2" name="タイトル 1">
             <a:extLst>
               <a:ext uri="{FF2B5EF4-FFF2-40B4-BE49-F238E27FC236}">
-                <a16:creationId xmlns:a16="http://schemas.microsoft.com/office/drawing/2014/main" id="{0FE5A152-639A-E730-50B2-2F8E1CE9B75F}"/>
+                <a16:creationId xmlns:a16="http://schemas.microsoft.com/office/drawing/2014/main" id="{9BDB3293-3AB0-045F-3529-B28941931F9B}"/>
               </a:ext>
             </a:extLst>
           </p:cNvPr>
@@ -6959,7 +6959,7 @@
     </p:spTree>
     <p:extLst>
       <p:ext uri="{BB962C8B-B14F-4D97-AF65-F5344CB8AC3E}">
-        <p14:creationId xmlns:p14="http://schemas.microsoft.com/office/powerpoint/2010/main" val="3910631139"/>
+        <p14:creationId xmlns:p14="http://schemas.microsoft.com/office/powerpoint/2010/main" val="1646325858"/>
       </p:ext>
     </p:extLst>
   </p:cSld>
@@ -6991,7 +6991,7 @@
           <p:cNvPr id="2" name="タイトル 1">
             <a:extLst>
               <a:ext uri="{FF2B5EF4-FFF2-40B4-BE49-F238E27FC236}">
-                <a16:creationId xmlns:a16="http://schemas.microsoft.com/office/drawing/2014/main" id="{532ABC0D-4855-EB86-EF01-3EACBB95F046}"/>
+                <a16:creationId xmlns:a16="http://schemas.microsoft.com/office/drawing/2014/main" id="{0F114F97-30FE-1218-5693-357B5E1169D6}"/>
               </a:ext>
             </a:extLst>
           </p:cNvPr>
@@ -7026,7 +7026,7 @@
     </p:spTree>
     <p:extLst>
       <p:ext uri="{BB962C8B-B14F-4D97-AF65-F5344CB8AC3E}">
-        <p14:creationId xmlns:p14="http://schemas.microsoft.com/office/powerpoint/2010/main" val="631941767"/>
+        <p14:creationId xmlns:p14="http://schemas.microsoft.com/office/powerpoint/2010/main" val="1144928589"/>
       </p:ext>
     </p:extLst>
   </p:cSld>
@@ -7058,7 +7058,7 @@
           <p:cNvPr id="2" name="タイトル 1">
             <a:extLst>
               <a:ext uri="{FF2B5EF4-FFF2-40B4-BE49-F238E27FC236}">
-                <a16:creationId xmlns:a16="http://schemas.microsoft.com/office/drawing/2014/main" id="{7C9BD238-FFB1-A9BC-6484-30449D9BD3A6}"/>
+                <a16:creationId xmlns:a16="http://schemas.microsoft.com/office/drawing/2014/main" id="{630D7F98-E882-3B6E-99F7-0093B2DC04C3}"/>
               </a:ext>
             </a:extLst>
           </p:cNvPr>
@@ -7093,7 +7093,7 @@
     </p:spTree>
     <p:extLst>
       <p:ext uri="{BB962C8B-B14F-4D97-AF65-F5344CB8AC3E}">
-        <p14:creationId xmlns:p14="http://schemas.microsoft.com/office/powerpoint/2010/main" val="3641027013"/>
+        <p14:creationId xmlns:p14="http://schemas.microsoft.com/office/powerpoint/2010/main" val="1761997344"/>
       </p:ext>
     </p:extLst>
   </p:cSld>
@@ -7125,7 +7125,7 @@
           <p:cNvPr id="2" name="タイトル 1">
             <a:extLst>
               <a:ext uri="{FF2B5EF4-FFF2-40B4-BE49-F238E27FC236}">
-                <a16:creationId xmlns:a16="http://schemas.microsoft.com/office/drawing/2014/main" id="{178A4202-686F-D6DB-07C4-A0F4F7B546FF}"/>
+                <a16:creationId xmlns:a16="http://schemas.microsoft.com/office/drawing/2014/main" id="{877F1C92-0F8A-A0ED-177F-9B00BA9DA1D7}"/>
               </a:ext>
             </a:extLst>
           </p:cNvPr>
@@ -7160,7 +7160,7 @@
     </p:spTree>
     <p:extLst>
       <p:ext uri="{BB962C8B-B14F-4D97-AF65-F5344CB8AC3E}">
-        <p14:creationId xmlns:p14="http://schemas.microsoft.com/office/powerpoint/2010/main" val="1968547455"/>
+        <p14:creationId xmlns:p14="http://schemas.microsoft.com/office/powerpoint/2010/main" val="4074561324"/>
       </p:ext>
     </p:extLst>
   </p:cSld>
@@ -7192,7 +7192,7 @@
           <p:cNvPr id="2" name="タイトル 1">
             <a:extLst>
               <a:ext uri="{FF2B5EF4-FFF2-40B4-BE49-F238E27FC236}">
-                <a16:creationId xmlns:a16="http://schemas.microsoft.com/office/drawing/2014/main" id="{D465ACBA-2C7F-A04D-FD93-85317D8FE1BE}"/>
+                <a16:creationId xmlns:a16="http://schemas.microsoft.com/office/drawing/2014/main" id="{FD6A08C3-8B38-7CF0-6F7A-4A1335DE08D6}"/>
               </a:ext>
             </a:extLst>
           </p:cNvPr>
@@ -7227,7 +7227,7 @@
     </p:spTree>
     <p:extLst>
       <p:ext uri="{BB962C8B-B14F-4D97-AF65-F5344CB8AC3E}">
-        <p14:creationId xmlns:p14="http://schemas.microsoft.com/office/powerpoint/2010/main" val="1555710283"/>
+        <p14:creationId xmlns:p14="http://schemas.microsoft.com/office/powerpoint/2010/main" val="2856559417"/>
       </p:ext>
     </p:extLst>
   </p:cSld>
@@ -7259,7 +7259,7 @@
           <p:cNvPr id="2" name="タイトル 1">
             <a:extLst>
               <a:ext uri="{FF2B5EF4-FFF2-40B4-BE49-F238E27FC236}">
-                <a16:creationId xmlns:a16="http://schemas.microsoft.com/office/drawing/2014/main" id="{19F79A9F-7E33-A9BF-018D-F78A9B897EF0}"/>
+                <a16:creationId xmlns:a16="http://schemas.microsoft.com/office/drawing/2014/main" id="{6848212B-925A-B46D-78B3-FEBCD54E0BD9}"/>
               </a:ext>
             </a:extLst>
           </p:cNvPr>
@@ -7294,7 +7294,7 @@
     </p:spTree>
     <p:extLst>
       <p:ext uri="{BB962C8B-B14F-4D97-AF65-F5344CB8AC3E}">
-        <p14:creationId xmlns:p14="http://schemas.microsoft.com/office/powerpoint/2010/main" val="3509063475"/>
+        <p14:creationId xmlns:p14="http://schemas.microsoft.com/office/powerpoint/2010/main" val="4121991045"/>
       </p:ext>
     </p:extLst>
   </p:cSld>
@@ -7326,7 +7326,7 @@
           <p:cNvPr id="2" name="タイトル 1">
             <a:extLst>
               <a:ext uri="{FF2B5EF4-FFF2-40B4-BE49-F238E27FC236}">
-                <a16:creationId xmlns:a16="http://schemas.microsoft.com/office/drawing/2014/main" id="{295EE9D9-3E8E-F1FA-7144-4B73123E46EC}"/>
+                <a16:creationId xmlns:a16="http://schemas.microsoft.com/office/drawing/2014/main" id="{11602DB5-D630-F3EE-9DDB-60AF362D7F6B}"/>
               </a:ext>
             </a:extLst>
           </p:cNvPr>
@@ -7361,7 +7361,7 @@
     </p:spTree>
     <p:extLst>
       <p:ext uri="{BB962C8B-B14F-4D97-AF65-F5344CB8AC3E}">
-        <p14:creationId xmlns:p14="http://schemas.microsoft.com/office/powerpoint/2010/main" val="1366392188"/>
+        <p14:creationId xmlns:p14="http://schemas.microsoft.com/office/powerpoint/2010/main" val="3264326357"/>
       </p:ext>
     </p:extLst>
   </p:cSld>
@@ -7393,7 +7393,7 @@
           <p:cNvPr id="2" name="タイトル 1">
             <a:extLst>
               <a:ext uri="{FF2B5EF4-FFF2-40B4-BE49-F238E27FC236}">
-                <a16:creationId xmlns:a16="http://schemas.microsoft.com/office/drawing/2014/main" id="{1D123CE2-FDA8-79F0-367E-F2E00148C0BE}"/>
+                <a16:creationId xmlns:a16="http://schemas.microsoft.com/office/drawing/2014/main" id="{07B5DDB2-E7A5-7246-1A99-DDABB0D61401}"/>
               </a:ext>
             </a:extLst>
           </p:cNvPr>
@@ -7428,7 +7428,7 @@
     </p:spTree>
     <p:extLst>
       <p:ext uri="{BB962C8B-B14F-4D97-AF65-F5344CB8AC3E}">
-        <p14:creationId xmlns:p14="http://schemas.microsoft.com/office/powerpoint/2010/main" val="3766147219"/>
+        <p14:creationId xmlns:p14="http://schemas.microsoft.com/office/powerpoint/2010/main" val="1905247301"/>
       </p:ext>
     </p:extLst>
   </p:cSld>
@@ -7460,7 +7460,7 @@
           <p:cNvPr id="2" name="タイトル 1">
             <a:extLst>
               <a:ext uri="{FF2B5EF4-FFF2-40B4-BE49-F238E27FC236}">
-                <a16:creationId xmlns:a16="http://schemas.microsoft.com/office/drawing/2014/main" id="{27EC1267-24AF-64B5-21D0-86750CD125E0}"/>
+                <a16:creationId xmlns:a16="http://schemas.microsoft.com/office/drawing/2014/main" id="{74574A49-3230-AADE-1BDA-FB7E2B849684}"/>
               </a:ext>
             </a:extLst>
           </p:cNvPr>
@@ -7495,7 +7495,7 @@
     </p:spTree>
     <p:extLst>
       <p:ext uri="{BB962C8B-B14F-4D97-AF65-F5344CB8AC3E}">
-        <p14:creationId xmlns:p14="http://schemas.microsoft.com/office/powerpoint/2010/main" val="3754935556"/>
+        <p14:creationId xmlns:p14="http://schemas.microsoft.com/office/powerpoint/2010/main" val="2999813673"/>
       </p:ext>
     </p:extLst>
   </p:cSld>
@@ -7527,7 +7527,7 @@
           <p:cNvPr id="2" name="タイトル 1">
             <a:extLst>
               <a:ext uri="{FF2B5EF4-FFF2-40B4-BE49-F238E27FC236}">
-                <a16:creationId xmlns:a16="http://schemas.microsoft.com/office/drawing/2014/main" id="{717E7EC4-8682-89F9-0A7F-6068042E7807}"/>
+                <a16:creationId xmlns:a16="http://schemas.microsoft.com/office/drawing/2014/main" id="{5CF068D3-69A5-9731-C090-25EB47A46CC8}"/>
               </a:ext>
             </a:extLst>
           </p:cNvPr>
@@ -7562,7 +7562,7 @@
     </p:spTree>
     <p:extLst>
       <p:ext uri="{BB962C8B-B14F-4D97-AF65-F5344CB8AC3E}">
-        <p14:creationId xmlns:p14="http://schemas.microsoft.com/office/powerpoint/2010/main" val="293748161"/>
+        <p14:creationId xmlns:p14="http://schemas.microsoft.com/office/powerpoint/2010/main" val="2484075244"/>
       </p:ext>
     </p:extLst>
   </p:cSld>
@@ -7594,7 +7594,7 @@
           <p:cNvPr id="2" name="タイトル 1">
             <a:extLst>
               <a:ext uri="{FF2B5EF4-FFF2-40B4-BE49-F238E27FC236}">
-                <a16:creationId xmlns:a16="http://schemas.microsoft.com/office/drawing/2014/main" id="{07E76FFC-A06F-9709-9719-D144BA7824A9}"/>
+                <a16:creationId xmlns:a16="http://schemas.microsoft.com/office/drawing/2014/main" id="{955171FD-8328-B118-648E-696FD73739AF}"/>
               </a:ext>
             </a:extLst>
           </p:cNvPr>
@@ -7629,7 +7629,7 @@
     </p:spTree>
     <p:extLst>
       <p:ext uri="{BB962C8B-B14F-4D97-AF65-F5344CB8AC3E}">
-        <p14:creationId xmlns:p14="http://schemas.microsoft.com/office/powerpoint/2010/main" val="164468138"/>
+        <p14:creationId xmlns:p14="http://schemas.microsoft.com/office/powerpoint/2010/main" val="2883440925"/>
       </p:ext>
     </p:extLst>
   </p:cSld>
@@ -7661,7 +7661,7 @@
           <p:cNvPr id="2" name="タイトル 1">
             <a:extLst>
               <a:ext uri="{FF2B5EF4-FFF2-40B4-BE49-F238E27FC236}">
-                <a16:creationId xmlns:a16="http://schemas.microsoft.com/office/drawing/2014/main" id="{CBD0408F-32A1-B01D-DB1B-EB0ED7832E78}"/>
+                <a16:creationId xmlns:a16="http://schemas.microsoft.com/office/drawing/2014/main" id="{01B0C4FB-3AFF-A0DC-5FE2-10F774BCBB1C}"/>
               </a:ext>
             </a:extLst>
           </p:cNvPr>
@@ -7696,7 +7696,7 @@
     </p:spTree>
     <p:extLst>
       <p:ext uri="{BB962C8B-B14F-4D97-AF65-F5344CB8AC3E}">
-        <p14:creationId xmlns:p14="http://schemas.microsoft.com/office/powerpoint/2010/main" val="1791757246"/>
+        <p14:creationId xmlns:p14="http://schemas.microsoft.com/office/powerpoint/2010/main" val="3521332123"/>
       </p:ext>
     </p:extLst>
   </p:cSld>
@@ -7728,7 +7728,7 @@
           <p:cNvPr id="2" name="タイトル 1">
             <a:extLst>
               <a:ext uri="{FF2B5EF4-FFF2-40B4-BE49-F238E27FC236}">
-                <a16:creationId xmlns:a16="http://schemas.microsoft.com/office/drawing/2014/main" id="{6EFB9FF7-3D46-5C6E-E452-171644E2196A}"/>
+                <a16:creationId xmlns:a16="http://schemas.microsoft.com/office/drawing/2014/main" id="{026EDA5E-C8EE-C116-2445-9A28DA3CEF7C}"/>
               </a:ext>
             </a:extLst>
           </p:cNvPr>
@@ -7763,7 +7763,7 @@
     </p:spTree>
     <p:extLst>
       <p:ext uri="{BB962C8B-B14F-4D97-AF65-F5344CB8AC3E}">
-        <p14:creationId xmlns:p14="http://schemas.microsoft.com/office/powerpoint/2010/main" val="3348841491"/>
+        <p14:creationId xmlns:p14="http://schemas.microsoft.com/office/powerpoint/2010/main" val="1297987369"/>
       </p:ext>
     </p:extLst>
   </p:cSld>
@@ -7795,7 +7795,7 @@
           <p:cNvPr id="2" name="タイトル 1">
             <a:extLst>
               <a:ext uri="{FF2B5EF4-FFF2-40B4-BE49-F238E27FC236}">
-                <a16:creationId xmlns:a16="http://schemas.microsoft.com/office/drawing/2014/main" id="{48A7CF09-6841-3C7A-74E8-DEDDD27D8C39}"/>
+                <a16:creationId xmlns:a16="http://schemas.microsoft.com/office/drawing/2014/main" id="{FB9EA1B1-D9F3-8DA8-5089-633CCBB4462E}"/>
               </a:ext>
             </a:extLst>
           </p:cNvPr>
@@ -7830,7 +7830,7 @@
     </p:spTree>
     <p:extLst>
       <p:ext uri="{BB962C8B-B14F-4D97-AF65-F5344CB8AC3E}">
-        <p14:creationId xmlns:p14="http://schemas.microsoft.com/office/powerpoint/2010/main" val="373817979"/>
+        <p14:creationId xmlns:p14="http://schemas.microsoft.com/office/powerpoint/2010/main" val="3399950203"/>
       </p:ext>
     </p:extLst>
   </p:cSld>
@@ -7862,7 +7862,7 @@
           <p:cNvPr id="2" name="タイトル 1">
             <a:extLst>
               <a:ext uri="{FF2B5EF4-FFF2-40B4-BE49-F238E27FC236}">
-                <a16:creationId xmlns:a16="http://schemas.microsoft.com/office/drawing/2014/main" id="{1CA27AE2-2112-D555-BE88-FE05FAB075EB}"/>
+                <a16:creationId xmlns:a16="http://schemas.microsoft.com/office/drawing/2014/main" id="{0EEEBA78-2EE6-7230-A1D9-49643B51D3CE}"/>
               </a:ext>
             </a:extLst>
           </p:cNvPr>
@@ -7897,7 +7897,7 @@
     </p:spTree>
     <p:extLst>
       <p:ext uri="{BB962C8B-B14F-4D97-AF65-F5344CB8AC3E}">
-        <p14:creationId xmlns:p14="http://schemas.microsoft.com/office/powerpoint/2010/main" val="3463682759"/>
+        <p14:creationId xmlns:p14="http://schemas.microsoft.com/office/powerpoint/2010/main" val="4165372890"/>
       </p:ext>
     </p:extLst>
   </p:cSld>
@@ -7929,7 +7929,7 @@
           <p:cNvPr id="2" name="タイトル 1">
             <a:extLst>
               <a:ext uri="{FF2B5EF4-FFF2-40B4-BE49-F238E27FC236}">
-                <a16:creationId xmlns:a16="http://schemas.microsoft.com/office/drawing/2014/main" id="{713A31CA-C806-57EB-E27B-FE98AFDC0CE9}"/>
+                <a16:creationId xmlns:a16="http://schemas.microsoft.com/office/drawing/2014/main" id="{884B3D63-8065-2750-3D10-FDA3A8E3E6C9}"/>
               </a:ext>
             </a:extLst>
           </p:cNvPr>
@@ -7964,7 +7964,7 @@
     </p:spTree>
     <p:extLst>
       <p:ext uri="{BB962C8B-B14F-4D97-AF65-F5344CB8AC3E}">
-        <p14:creationId xmlns:p14="http://schemas.microsoft.com/office/powerpoint/2010/main" val="2429962965"/>
+        <p14:creationId xmlns:p14="http://schemas.microsoft.com/office/powerpoint/2010/main" val="2651399582"/>
       </p:ext>
     </p:extLst>
   </p:cSld>
@@ -7996,7 +7996,7 @@
           <p:cNvPr id="2" name="タイトル 1">
             <a:extLst>
               <a:ext uri="{FF2B5EF4-FFF2-40B4-BE49-F238E27FC236}">
-                <a16:creationId xmlns:a16="http://schemas.microsoft.com/office/drawing/2014/main" id="{585EC5BF-C299-2EFA-02F5-AEF1A28EA056}"/>
+                <a16:creationId xmlns:a16="http://schemas.microsoft.com/office/drawing/2014/main" id="{03642AF1-6C3B-8234-5DD2-2C45572C2A0E}"/>
               </a:ext>
             </a:extLst>
           </p:cNvPr>
@@ -8031,7 +8031,7 @@
     </p:spTree>
     <p:extLst>
       <p:ext uri="{BB962C8B-B14F-4D97-AF65-F5344CB8AC3E}">
-        <p14:creationId xmlns:p14="http://schemas.microsoft.com/office/powerpoint/2010/main" val="3073382813"/>
+        <p14:creationId xmlns:p14="http://schemas.microsoft.com/office/powerpoint/2010/main" val="4190037057"/>
       </p:ext>
     </p:extLst>
   </p:cSld>
@@ -8063,7 +8063,7 @@
           <p:cNvPr id="2" name="タイトル 1">
             <a:extLst>
               <a:ext uri="{FF2B5EF4-FFF2-40B4-BE49-F238E27FC236}">
-                <a16:creationId xmlns:a16="http://schemas.microsoft.com/office/drawing/2014/main" id="{D6F379BD-E64F-6BCB-1E48-6D7D2B91EBB9}"/>
+                <a16:creationId xmlns:a16="http://schemas.microsoft.com/office/drawing/2014/main" id="{AA52EFB6-7BE4-58BC-9B7D-877A242911DD}"/>
               </a:ext>
             </a:extLst>
           </p:cNvPr>
@@ -8098,7 +8098,7 @@
     </p:spTree>
     <p:extLst>
       <p:ext uri="{BB962C8B-B14F-4D97-AF65-F5344CB8AC3E}">
-        <p14:creationId xmlns:p14="http://schemas.microsoft.com/office/powerpoint/2010/main" val="2892485044"/>
+        <p14:creationId xmlns:p14="http://schemas.microsoft.com/office/powerpoint/2010/main" val="525706545"/>
       </p:ext>
     </p:extLst>
   </p:cSld>
@@ -8130,7 +8130,7 @@
           <p:cNvPr id="2" name="タイトル 1">
             <a:extLst>
               <a:ext uri="{FF2B5EF4-FFF2-40B4-BE49-F238E27FC236}">
-                <a16:creationId xmlns:a16="http://schemas.microsoft.com/office/drawing/2014/main" id="{346EC610-8B0B-1815-4AA4-28B221B32200}"/>
+                <a16:creationId xmlns:a16="http://schemas.microsoft.com/office/drawing/2014/main" id="{956D2369-D3B1-C5F2-62A3-D52428F738A0}"/>
               </a:ext>
             </a:extLst>
           </p:cNvPr>
@@ -8165,7 +8165,7 @@
     </p:spTree>
     <p:extLst>
       <p:ext uri="{BB962C8B-B14F-4D97-AF65-F5344CB8AC3E}">
-        <p14:creationId xmlns:p14="http://schemas.microsoft.com/office/powerpoint/2010/main" val="106407961"/>
+        <p14:creationId xmlns:p14="http://schemas.microsoft.com/office/powerpoint/2010/main" val="964193958"/>
       </p:ext>
     </p:extLst>
   </p:cSld>
@@ -8197,7 +8197,7 @@
           <p:cNvPr id="2" name="タイトル 1">
             <a:extLst>
               <a:ext uri="{FF2B5EF4-FFF2-40B4-BE49-F238E27FC236}">
-                <a16:creationId xmlns:a16="http://schemas.microsoft.com/office/drawing/2014/main" id="{1D510614-869D-39C8-BF19-41913C0F9868}"/>
+                <a16:creationId xmlns:a16="http://schemas.microsoft.com/office/drawing/2014/main" id="{33D147EC-65AA-43FB-8B14-A1BE6EB8E0BE}"/>
               </a:ext>
             </a:extLst>
           </p:cNvPr>
@@ -8232,7 +8232,7 @@
     </p:spTree>
     <p:extLst>
       <p:ext uri="{BB962C8B-B14F-4D97-AF65-F5344CB8AC3E}">
-        <p14:creationId xmlns:p14="http://schemas.microsoft.com/office/powerpoint/2010/main" val="2449369712"/>
+        <p14:creationId xmlns:p14="http://schemas.microsoft.com/office/powerpoint/2010/main" val="3567708950"/>
       </p:ext>
     </p:extLst>
   </p:cSld>
@@ -8264,7 +8264,7 @@
           <p:cNvPr id="2" name="タイトル 1">
             <a:extLst>
               <a:ext uri="{FF2B5EF4-FFF2-40B4-BE49-F238E27FC236}">
-                <a16:creationId xmlns:a16="http://schemas.microsoft.com/office/drawing/2014/main" id="{DB243443-A6E2-23DD-CB4B-70C1462C1AF0}"/>
+                <a16:creationId xmlns:a16="http://schemas.microsoft.com/office/drawing/2014/main" id="{39446D9D-55FE-0578-5CE8-03A87ADA8780}"/>
               </a:ext>
             </a:extLst>
           </p:cNvPr>
@@ -8299,7 +8299,7 @@
     </p:spTree>
     <p:extLst>
       <p:ext uri="{BB962C8B-B14F-4D97-AF65-F5344CB8AC3E}">
-        <p14:creationId xmlns:p14="http://schemas.microsoft.com/office/powerpoint/2010/main" val="3687816705"/>
+        <p14:creationId xmlns:p14="http://schemas.microsoft.com/office/powerpoint/2010/main" val="3132429284"/>
       </p:ext>
     </p:extLst>
   </p:cSld>
@@ -8331,7 +8331,7 @@
           <p:cNvPr id="2" name="タイトル 1">
             <a:extLst>
               <a:ext uri="{FF2B5EF4-FFF2-40B4-BE49-F238E27FC236}">
-                <a16:creationId xmlns:a16="http://schemas.microsoft.com/office/drawing/2014/main" id="{1C3766BC-9A6C-D3E4-3AAC-CD68A0DA270C}"/>
+                <a16:creationId xmlns:a16="http://schemas.microsoft.com/office/drawing/2014/main" id="{9E59F719-853E-5E13-2D33-1204429DB47D}"/>
               </a:ext>
             </a:extLst>
           </p:cNvPr>
@@ -8366,7 +8366,7 @@
     </p:spTree>
     <p:extLst>
       <p:ext uri="{BB962C8B-B14F-4D97-AF65-F5344CB8AC3E}">
-        <p14:creationId xmlns:p14="http://schemas.microsoft.com/office/powerpoint/2010/main" val="2743729111"/>
+        <p14:creationId xmlns:p14="http://schemas.microsoft.com/office/powerpoint/2010/main" val="1936864449"/>
       </p:ext>
     </p:extLst>
   </p:cSld>
@@ -8398,7 +8398,7 @@
           <p:cNvPr id="2" name="タイトル 1">
             <a:extLst>
               <a:ext uri="{FF2B5EF4-FFF2-40B4-BE49-F238E27FC236}">
-                <a16:creationId xmlns:a16="http://schemas.microsoft.com/office/drawing/2014/main" id="{7191ABAF-FD01-64A8-198A-AC79BAAC125C}"/>
+                <a16:creationId xmlns:a16="http://schemas.microsoft.com/office/drawing/2014/main" id="{CF31063B-DC19-3347-DE69-EC3EE76B7DBA}"/>
               </a:ext>
             </a:extLst>
           </p:cNvPr>
@@ -8433,7 +8433,7 @@
     </p:spTree>
     <p:extLst>
       <p:ext uri="{BB962C8B-B14F-4D97-AF65-F5344CB8AC3E}">
-        <p14:creationId xmlns:p14="http://schemas.microsoft.com/office/powerpoint/2010/main" val="4066233571"/>
+        <p14:creationId xmlns:p14="http://schemas.microsoft.com/office/powerpoint/2010/main" val="1512515594"/>
       </p:ext>
     </p:extLst>
   </p:cSld>
@@ -8465,7 +8465,7 @@
           <p:cNvPr id="2" name="タイトル 1">
             <a:extLst>
               <a:ext uri="{FF2B5EF4-FFF2-40B4-BE49-F238E27FC236}">
-                <a16:creationId xmlns:a16="http://schemas.microsoft.com/office/drawing/2014/main" id="{5B280C92-265B-E915-5815-5F235EF6B738}"/>
+                <a16:creationId xmlns:a16="http://schemas.microsoft.com/office/drawing/2014/main" id="{5A8D8412-D1BA-F023-525B-BE4287E492C7}"/>
               </a:ext>
             </a:extLst>
           </p:cNvPr>
@@ -8500,7 +8500,7 @@
     </p:spTree>
     <p:extLst>
       <p:ext uri="{BB962C8B-B14F-4D97-AF65-F5344CB8AC3E}">
-        <p14:creationId xmlns:p14="http://schemas.microsoft.com/office/powerpoint/2010/main" val="2084210544"/>
+        <p14:creationId xmlns:p14="http://schemas.microsoft.com/office/powerpoint/2010/main" val="1819003259"/>
       </p:ext>
     </p:extLst>
   </p:cSld>
@@ -8532,7 +8532,7 @@
           <p:cNvPr id="2" name="タイトル 1">
             <a:extLst>
               <a:ext uri="{FF2B5EF4-FFF2-40B4-BE49-F238E27FC236}">
-                <a16:creationId xmlns:a16="http://schemas.microsoft.com/office/drawing/2014/main" id="{B909D42A-86E2-4217-5E1B-3EC1B84DE321}"/>
+                <a16:creationId xmlns:a16="http://schemas.microsoft.com/office/drawing/2014/main" id="{A4F38AF6-F48F-B87C-200C-CACE9DB8183D}"/>
               </a:ext>
             </a:extLst>
           </p:cNvPr>
@@ -8567,7 +8567,7 @@
     </p:spTree>
     <p:extLst>
       <p:ext uri="{BB962C8B-B14F-4D97-AF65-F5344CB8AC3E}">
-        <p14:creationId xmlns:p14="http://schemas.microsoft.com/office/powerpoint/2010/main" val="518438884"/>
+        <p14:creationId xmlns:p14="http://schemas.microsoft.com/office/powerpoint/2010/main" val="2041180224"/>
       </p:ext>
     </p:extLst>
   </p:cSld>
@@ -8599,7 +8599,7 @@
           <p:cNvPr id="2" name="タイトル 1">
             <a:extLst>
               <a:ext uri="{FF2B5EF4-FFF2-40B4-BE49-F238E27FC236}">
-                <a16:creationId xmlns:a16="http://schemas.microsoft.com/office/drawing/2014/main" id="{32F42C5C-2BB5-AE78-E429-F00FB36F8482}"/>
+                <a16:creationId xmlns:a16="http://schemas.microsoft.com/office/drawing/2014/main" id="{D85AC5F2-9C30-8CE2-0F8D-9D43BBAB169E}"/>
               </a:ext>
             </a:extLst>
           </p:cNvPr>
@@ -8634,7 +8634,7 @@
     </p:spTree>
     <p:extLst>
       <p:ext uri="{BB962C8B-B14F-4D97-AF65-F5344CB8AC3E}">
-        <p14:creationId xmlns:p14="http://schemas.microsoft.com/office/powerpoint/2010/main" val="3845862542"/>
+        <p14:creationId xmlns:p14="http://schemas.microsoft.com/office/powerpoint/2010/main" val="1988530153"/>
       </p:ext>
     </p:extLst>
   </p:cSld>
@@ -8666,7 +8666,7 @@
           <p:cNvPr id="2" name="タイトル 1">
             <a:extLst>
               <a:ext uri="{FF2B5EF4-FFF2-40B4-BE49-F238E27FC236}">
-                <a16:creationId xmlns:a16="http://schemas.microsoft.com/office/drawing/2014/main" id="{576B8211-4FC1-C986-66E6-844B4C2881EC}"/>
+                <a16:creationId xmlns:a16="http://schemas.microsoft.com/office/drawing/2014/main" id="{9B675D0D-9B1F-B9D0-17C8-8BA84F354F20}"/>
               </a:ext>
             </a:extLst>
           </p:cNvPr>
@@ -8701,7 +8701,7 @@
     </p:spTree>
     <p:extLst>
       <p:ext uri="{BB962C8B-B14F-4D97-AF65-F5344CB8AC3E}">
-        <p14:creationId xmlns:p14="http://schemas.microsoft.com/office/powerpoint/2010/main" val="2888175216"/>
+        <p14:creationId xmlns:p14="http://schemas.microsoft.com/office/powerpoint/2010/main" val="1384194784"/>
       </p:ext>
     </p:extLst>
   </p:cSld>
@@ -8733,7 +8733,7 @@
           <p:cNvPr id="2" name="タイトル 1">
             <a:extLst>
               <a:ext uri="{FF2B5EF4-FFF2-40B4-BE49-F238E27FC236}">
-                <a16:creationId xmlns:a16="http://schemas.microsoft.com/office/drawing/2014/main" id="{044646D8-BCC9-B3E6-6604-9A8D9E762310}"/>
+                <a16:creationId xmlns:a16="http://schemas.microsoft.com/office/drawing/2014/main" id="{515859F5-3646-452B-5B5D-787FDBED754D}"/>
               </a:ext>
             </a:extLst>
           </p:cNvPr>
@@ -8768,7 +8768,7 @@
     </p:spTree>
     <p:extLst>
       <p:ext uri="{BB962C8B-B14F-4D97-AF65-F5344CB8AC3E}">
-        <p14:creationId xmlns:p14="http://schemas.microsoft.com/office/powerpoint/2010/main" val="2597426992"/>
+        <p14:creationId xmlns:p14="http://schemas.microsoft.com/office/powerpoint/2010/main" val="2884978117"/>
       </p:ext>
     </p:extLst>
   </p:cSld>
@@ -8800,7 +8800,7 @@
           <p:cNvPr id="2" name="タイトル 1">
             <a:extLst>
               <a:ext uri="{FF2B5EF4-FFF2-40B4-BE49-F238E27FC236}">
-                <a16:creationId xmlns:a16="http://schemas.microsoft.com/office/drawing/2014/main" id="{BFF6075B-A938-5611-E48B-47E10883CBD2}"/>
+                <a16:creationId xmlns:a16="http://schemas.microsoft.com/office/drawing/2014/main" id="{8AEA97F4-8F65-21B0-0C2C-61CCA258B499}"/>
               </a:ext>
             </a:extLst>
           </p:cNvPr>
@@ -8835,7 +8835,7 @@
     </p:spTree>
     <p:extLst>
       <p:ext uri="{BB962C8B-B14F-4D97-AF65-F5344CB8AC3E}">
-        <p14:creationId xmlns:p14="http://schemas.microsoft.com/office/powerpoint/2010/main" val="2511965705"/>
+        <p14:creationId xmlns:p14="http://schemas.microsoft.com/office/powerpoint/2010/main" val="46058189"/>
       </p:ext>
     </p:extLst>
   </p:cSld>
@@ -8867,7 +8867,7 @@
           <p:cNvPr id="2" name="タイトル 1">
             <a:extLst>
               <a:ext uri="{FF2B5EF4-FFF2-40B4-BE49-F238E27FC236}">
-                <a16:creationId xmlns:a16="http://schemas.microsoft.com/office/drawing/2014/main" id="{B482696B-798B-00F1-3B0A-31F9470348FF}"/>
+                <a16:creationId xmlns:a16="http://schemas.microsoft.com/office/drawing/2014/main" id="{9E745D21-E59E-064A-AED2-9A35A64780CC}"/>
               </a:ext>
             </a:extLst>
           </p:cNvPr>
@@ -8902,7 +8902,7 @@
     </p:spTree>
     <p:extLst>
       <p:ext uri="{BB962C8B-B14F-4D97-AF65-F5344CB8AC3E}">
-        <p14:creationId xmlns:p14="http://schemas.microsoft.com/office/powerpoint/2010/main" val="2942967414"/>
+        <p14:creationId xmlns:p14="http://schemas.microsoft.com/office/powerpoint/2010/main" val="358380382"/>
       </p:ext>
     </p:extLst>
   </p:cSld>
@@ -8934,7 +8934,7 @@
           <p:cNvPr id="2" name="タイトル 1">
             <a:extLst>
               <a:ext uri="{FF2B5EF4-FFF2-40B4-BE49-F238E27FC236}">
-                <a16:creationId xmlns:a16="http://schemas.microsoft.com/office/drawing/2014/main" id="{7A94CA87-9545-DD88-A93A-8BEF80A47E3A}"/>
+                <a16:creationId xmlns:a16="http://schemas.microsoft.com/office/drawing/2014/main" id="{E069CC7E-B2AD-2FF5-95D6-D66036375208}"/>
               </a:ext>
             </a:extLst>
           </p:cNvPr>
@@ -8969,7 +8969,7 @@
     </p:spTree>
     <p:extLst>
       <p:ext uri="{BB962C8B-B14F-4D97-AF65-F5344CB8AC3E}">
-        <p14:creationId xmlns:p14="http://schemas.microsoft.com/office/powerpoint/2010/main" val="1643101221"/>
+        <p14:creationId xmlns:p14="http://schemas.microsoft.com/office/powerpoint/2010/main" val="590672975"/>
       </p:ext>
     </p:extLst>
   </p:cSld>
@@ -9001,7 +9001,7 @@
           <p:cNvPr id="2" name="タイトル 1">
             <a:extLst>
               <a:ext uri="{FF2B5EF4-FFF2-40B4-BE49-F238E27FC236}">
-                <a16:creationId xmlns:a16="http://schemas.microsoft.com/office/drawing/2014/main" id="{BADDC934-9A56-5DEB-16C9-406B51051DC6}"/>
+                <a16:creationId xmlns:a16="http://schemas.microsoft.com/office/drawing/2014/main" id="{F04AE239-6A61-4C1F-5379-EF030D97D6C1}"/>
               </a:ext>
             </a:extLst>
           </p:cNvPr>
@@ -9036,7 +9036,7 @@
     </p:spTree>
     <p:extLst>
       <p:ext uri="{BB962C8B-B14F-4D97-AF65-F5344CB8AC3E}">
-        <p14:creationId xmlns:p14="http://schemas.microsoft.com/office/powerpoint/2010/main" val="2900192147"/>
+        <p14:creationId xmlns:p14="http://schemas.microsoft.com/office/powerpoint/2010/main" val="3533537796"/>
       </p:ext>
     </p:extLst>
   </p:cSld>
@@ -9068,7 +9068,7 @@
           <p:cNvPr id="2" name="タイトル 1">
             <a:extLst>
               <a:ext uri="{FF2B5EF4-FFF2-40B4-BE49-F238E27FC236}">
-                <a16:creationId xmlns:a16="http://schemas.microsoft.com/office/drawing/2014/main" id="{880772AE-A61F-6293-6DC4-43F228E84F8B}"/>
+                <a16:creationId xmlns:a16="http://schemas.microsoft.com/office/drawing/2014/main" id="{5C41D129-E7C1-BF22-5B68-AA4DB7596819}"/>
               </a:ext>
             </a:extLst>
           </p:cNvPr>
@@ -9103,7 +9103,7 @@
     </p:spTree>
     <p:extLst>
       <p:ext uri="{BB962C8B-B14F-4D97-AF65-F5344CB8AC3E}">
-        <p14:creationId xmlns:p14="http://schemas.microsoft.com/office/powerpoint/2010/main" val="124138189"/>
+        <p14:creationId xmlns:p14="http://schemas.microsoft.com/office/powerpoint/2010/main" val="1670467744"/>
       </p:ext>
     </p:extLst>
   </p:cSld>
@@ -9135,7 +9135,7 @@
           <p:cNvPr id="2" name="タイトル 1">
             <a:extLst>
               <a:ext uri="{FF2B5EF4-FFF2-40B4-BE49-F238E27FC236}">
-                <a16:creationId xmlns:a16="http://schemas.microsoft.com/office/drawing/2014/main" id="{2A9A945A-C2D4-7ADA-E672-A08E936D904F}"/>
+                <a16:creationId xmlns:a16="http://schemas.microsoft.com/office/drawing/2014/main" id="{CCEB5324-B9FB-953E-76E6-1EF4E26276F2}"/>
               </a:ext>
             </a:extLst>
           </p:cNvPr>
@@ -9170,7 +9170,7 @@
     </p:spTree>
     <p:extLst>
       <p:ext uri="{BB962C8B-B14F-4D97-AF65-F5344CB8AC3E}">
-        <p14:creationId xmlns:p14="http://schemas.microsoft.com/office/powerpoint/2010/main" val="829123221"/>
+        <p14:creationId xmlns:p14="http://schemas.microsoft.com/office/powerpoint/2010/main" val="1175094917"/>
       </p:ext>
     </p:extLst>
   </p:cSld>
@@ -9202,7 +9202,7 @@
           <p:cNvPr id="2" name="タイトル 1">
             <a:extLst>
               <a:ext uri="{FF2B5EF4-FFF2-40B4-BE49-F238E27FC236}">
-                <a16:creationId xmlns:a16="http://schemas.microsoft.com/office/drawing/2014/main" id="{AA461B35-E29E-A2EB-439C-DECB91C37496}"/>
+                <a16:creationId xmlns:a16="http://schemas.microsoft.com/office/drawing/2014/main" id="{E3C6E7A7-3C34-88E5-581B-EFDB83960614}"/>
               </a:ext>
             </a:extLst>
           </p:cNvPr>
@@ -9237,7 +9237,7 @@
     </p:spTree>
     <p:extLst>
       <p:ext uri="{BB962C8B-B14F-4D97-AF65-F5344CB8AC3E}">
-        <p14:creationId xmlns:p14="http://schemas.microsoft.com/office/powerpoint/2010/main" val="2027089311"/>
+        <p14:creationId xmlns:p14="http://schemas.microsoft.com/office/powerpoint/2010/main" val="137602199"/>
       </p:ext>
     </p:extLst>
   </p:cSld>
@@ -9269,7 +9269,7 @@
           <p:cNvPr id="2" name="タイトル 1">
             <a:extLst>
               <a:ext uri="{FF2B5EF4-FFF2-40B4-BE49-F238E27FC236}">
-                <a16:creationId xmlns:a16="http://schemas.microsoft.com/office/drawing/2014/main" id="{50D0A062-B7AC-4D6E-900F-89D953E01600}"/>
+                <a16:creationId xmlns:a16="http://schemas.microsoft.com/office/drawing/2014/main" id="{70CAB348-7F3E-8C4F-B863-0AD977742DD4}"/>
               </a:ext>
             </a:extLst>
           </p:cNvPr>
@@ -9304,7 +9304,7 @@
     </p:spTree>
     <p:extLst>
       <p:ext uri="{BB962C8B-B14F-4D97-AF65-F5344CB8AC3E}">
-        <p14:creationId xmlns:p14="http://schemas.microsoft.com/office/powerpoint/2010/main" val="4147032916"/>
+        <p14:creationId xmlns:p14="http://schemas.microsoft.com/office/powerpoint/2010/main" val="2715294275"/>
       </p:ext>
     </p:extLst>
   </p:cSld>
@@ -9336,7 +9336,7 @@
           <p:cNvPr id="2" name="タイトル 1">
             <a:extLst>
               <a:ext uri="{FF2B5EF4-FFF2-40B4-BE49-F238E27FC236}">
-                <a16:creationId xmlns:a16="http://schemas.microsoft.com/office/drawing/2014/main" id="{07FDC0A6-132A-A0ED-23A2-527DD5CE97DE}"/>
+                <a16:creationId xmlns:a16="http://schemas.microsoft.com/office/drawing/2014/main" id="{399B90B6-E35F-3B80-7BFE-DE4701357B29}"/>
               </a:ext>
             </a:extLst>
           </p:cNvPr>
@@ -9371,7 +9371,7 @@
     </p:spTree>
     <p:extLst>
       <p:ext uri="{BB962C8B-B14F-4D97-AF65-F5344CB8AC3E}">
-        <p14:creationId xmlns:p14="http://schemas.microsoft.com/office/powerpoint/2010/main" val="2580734483"/>
+        <p14:creationId xmlns:p14="http://schemas.microsoft.com/office/powerpoint/2010/main" val="4115661461"/>
       </p:ext>
     </p:extLst>
   </p:cSld>
@@ -9403,7 +9403,7 @@
           <p:cNvPr id="2" name="タイトル 1">
             <a:extLst>
               <a:ext uri="{FF2B5EF4-FFF2-40B4-BE49-F238E27FC236}">
-                <a16:creationId xmlns:a16="http://schemas.microsoft.com/office/drawing/2014/main" id="{EB54C978-A81E-765A-0CCB-9B91CB164A47}"/>
+                <a16:creationId xmlns:a16="http://schemas.microsoft.com/office/drawing/2014/main" id="{D79AA2E3-E4FE-EF9F-3235-B2F7C180B3E6}"/>
               </a:ext>
             </a:extLst>
           </p:cNvPr>
@@ -9438,7 +9438,7 @@
     </p:spTree>
     <p:extLst>
       <p:ext uri="{BB962C8B-B14F-4D97-AF65-F5344CB8AC3E}">
-        <p14:creationId xmlns:p14="http://schemas.microsoft.com/office/powerpoint/2010/main" val="553912178"/>
+        <p14:creationId xmlns:p14="http://schemas.microsoft.com/office/powerpoint/2010/main" val="1081241068"/>
       </p:ext>
     </p:extLst>
   </p:cSld>
@@ -9470,7 +9470,7 @@
           <p:cNvPr id="2" name="タイトル 1">
             <a:extLst>
               <a:ext uri="{FF2B5EF4-FFF2-40B4-BE49-F238E27FC236}">
-                <a16:creationId xmlns:a16="http://schemas.microsoft.com/office/drawing/2014/main" id="{52058804-04BE-A603-681A-4D68AC9C2EBD}"/>
+                <a16:creationId xmlns:a16="http://schemas.microsoft.com/office/drawing/2014/main" id="{98935008-57F1-4464-419D-6E08449C74DA}"/>
               </a:ext>
             </a:extLst>
           </p:cNvPr>
@@ -9505,7 +9505,7 @@
     </p:spTree>
     <p:extLst>
       <p:ext uri="{BB962C8B-B14F-4D97-AF65-F5344CB8AC3E}">
-        <p14:creationId xmlns:p14="http://schemas.microsoft.com/office/powerpoint/2010/main" val="2351373924"/>
+        <p14:creationId xmlns:p14="http://schemas.microsoft.com/office/powerpoint/2010/main" val="4081598868"/>
       </p:ext>
     </p:extLst>
   </p:cSld>
@@ -9537,7 +9537,7 @@
           <p:cNvPr id="2" name="タイトル 1">
             <a:extLst>
               <a:ext uri="{FF2B5EF4-FFF2-40B4-BE49-F238E27FC236}">
-                <a16:creationId xmlns:a16="http://schemas.microsoft.com/office/drawing/2014/main" id="{0ECB450B-10CE-C7EE-3AEE-609A0BB829C3}"/>
+                <a16:creationId xmlns:a16="http://schemas.microsoft.com/office/drawing/2014/main" id="{D92625C5-A0CD-E14C-E4A7-6365E007BA3F}"/>
               </a:ext>
             </a:extLst>
           </p:cNvPr>
@@ -9572,7 +9572,7 @@
     </p:spTree>
     <p:extLst>
       <p:ext uri="{BB962C8B-B14F-4D97-AF65-F5344CB8AC3E}">
-        <p14:creationId xmlns:p14="http://schemas.microsoft.com/office/powerpoint/2010/main" val="1099874258"/>
+        <p14:creationId xmlns:p14="http://schemas.microsoft.com/office/powerpoint/2010/main" val="2425897577"/>
       </p:ext>
     </p:extLst>
   </p:cSld>
@@ -9604,7 +9604,7 @@
           <p:cNvPr id="2" name="タイトル 1">
             <a:extLst>
               <a:ext uri="{FF2B5EF4-FFF2-40B4-BE49-F238E27FC236}">
-                <a16:creationId xmlns:a16="http://schemas.microsoft.com/office/drawing/2014/main" id="{DADB2EAD-98D1-7B6F-35B1-96FBA6C651E6}"/>
+                <a16:creationId xmlns:a16="http://schemas.microsoft.com/office/drawing/2014/main" id="{7210DB6F-ECF4-9AD9-B265-7C703F693474}"/>
               </a:ext>
             </a:extLst>
           </p:cNvPr>
@@ -9639,7 +9639,7 @@
     </p:spTree>
     <p:extLst>
       <p:ext uri="{BB962C8B-B14F-4D97-AF65-F5344CB8AC3E}">
-        <p14:creationId xmlns:p14="http://schemas.microsoft.com/office/powerpoint/2010/main" val="1981927735"/>
+        <p14:creationId xmlns:p14="http://schemas.microsoft.com/office/powerpoint/2010/main" val="1525283592"/>
       </p:ext>
     </p:extLst>
   </p:cSld>
@@ -9671,7 +9671,7 @@
           <p:cNvPr id="2" name="タイトル 1">
             <a:extLst>
               <a:ext uri="{FF2B5EF4-FFF2-40B4-BE49-F238E27FC236}">
-                <a16:creationId xmlns:a16="http://schemas.microsoft.com/office/drawing/2014/main" id="{6BC08BBD-0333-BD95-163F-7871F41AD48E}"/>
+                <a16:creationId xmlns:a16="http://schemas.microsoft.com/office/drawing/2014/main" id="{1945CCAE-8F15-2D9E-1C6E-2313A14255FF}"/>
               </a:ext>
             </a:extLst>
           </p:cNvPr>
@@ -9706,7 +9706,7 @@
     </p:spTree>
     <p:extLst>
       <p:ext uri="{BB962C8B-B14F-4D97-AF65-F5344CB8AC3E}">
-        <p14:creationId xmlns:p14="http://schemas.microsoft.com/office/powerpoint/2010/main" val="84135882"/>
+        <p14:creationId xmlns:p14="http://schemas.microsoft.com/office/powerpoint/2010/main" val="1769254086"/>
       </p:ext>
     </p:extLst>
   </p:cSld>
@@ -9738,7 +9738,7 @@
           <p:cNvPr id="2" name="タイトル 1">
             <a:extLst>
               <a:ext uri="{FF2B5EF4-FFF2-40B4-BE49-F238E27FC236}">
-                <a16:creationId xmlns:a16="http://schemas.microsoft.com/office/drawing/2014/main" id="{9FCAA6F2-F3E1-5251-3148-D1A4FF74882B}"/>
+                <a16:creationId xmlns:a16="http://schemas.microsoft.com/office/drawing/2014/main" id="{5779F203-37C7-40EF-E67F-A056411AE1E7}"/>
               </a:ext>
             </a:extLst>
           </p:cNvPr>
@@ -9773,7 +9773,7 @@
     </p:spTree>
     <p:extLst>
       <p:ext uri="{BB962C8B-B14F-4D97-AF65-F5344CB8AC3E}">
-        <p14:creationId xmlns:p14="http://schemas.microsoft.com/office/powerpoint/2010/main" val="1247205774"/>
+        <p14:creationId xmlns:p14="http://schemas.microsoft.com/office/powerpoint/2010/main" val="2093048242"/>
       </p:ext>
     </p:extLst>
   </p:cSld>
@@ -9805,7 +9805,7 @@
           <p:cNvPr id="2" name="タイトル 1">
             <a:extLst>
               <a:ext uri="{FF2B5EF4-FFF2-40B4-BE49-F238E27FC236}">
-                <a16:creationId xmlns:a16="http://schemas.microsoft.com/office/drawing/2014/main" id="{1CDD9F5D-C3C3-8D81-7445-9385848A3DDC}"/>
+                <a16:creationId xmlns:a16="http://schemas.microsoft.com/office/drawing/2014/main" id="{8F33D030-7EBC-442E-B76A-1A60F8F74849}"/>
               </a:ext>
             </a:extLst>
           </p:cNvPr>
@@ -9840,7 +9840,7 @@
     </p:spTree>
     <p:extLst>
       <p:ext uri="{BB962C8B-B14F-4D97-AF65-F5344CB8AC3E}">
-        <p14:creationId xmlns:p14="http://schemas.microsoft.com/office/powerpoint/2010/main" val="211150687"/>
+        <p14:creationId xmlns:p14="http://schemas.microsoft.com/office/powerpoint/2010/main" val="3007788760"/>
       </p:ext>
     </p:extLst>
   </p:cSld>
@@ -9872,7 +9872,7 @@
           <p:cNvPr id="2" name="タイトル 1">
             <a:extLst>
               <a:ext uri="{FF2B5EF4-FFF2-40B4-BE49-F238E27FC236}">
-                <a16:creationId xmlns:a16="http://schemas.microsoft.com/office/drawing/2014/main" id="{BEAB5EE3-F164-A082-00D3-3D4BF002F340}"/>
+                <a16:creationId xmlns:a16="http://schemas.microsoft.com/office/drawing/2014/main" id="{DB70650B-C503-B234-102E-C56466D4D864}"/>
               </a:ext>
             </a:extLst>
           </p:cNvPr>
@@ -9907,7 +9907,7 @@
     </p:spTree>
     <p:extLst>
       <p:ext uri="{BB962C8B-B14F-4D97-AF65-F5344CB8AC3E}">
-        <p14:creationId xmlns:p14="http://schemas.microsoft.com/office/powerpoint/2010/main" val="1023448087"/>
+        <p14:creationId xmlns:p14="http://schemas.microsoft.com/office/powerpoint/2010/main" val="892696913"/>
       </p:ext>
     </p:extLst>
   </p:cSld>
@@ -9939,7 +9939,7 @@
           <p:cNvPr id="2" name="タイトル 1">
             <a:extLst>
               <a:ext uri="{FF2B5EF4-FFF2-40B4-BE49-F238E27FC236}">
-                <a16:creationId xmlns:a16="http://schemas.microsoft.com/office/drawing/2014/main" id="{813D6D37-7FE3-BC0A-C209-5D2D7A614829}"/>
+                <a16:creationId xmlns:a16="http://schemas.microsoft.com/office/drawing/2014/main" id="{3F1333B1-2AF8-D28A-FD9E-8228E630CA96}"/>
               </a:ext>
             </a:extLst>
           </p:cNvPr>
@@ -9974,7 +9974,7 @@
     </p:spTree>
     <p:extLst>
       <p:ext uri="{BB962C8B-B14F-4D97-AF65-F5344CB8AC3E}">
-        <p14:creationId xmlns:p14="http://schemas.microsoft.com/office/powerpoint/2010/main" val="524366118"/>
+        <p14:creationId xmlns:p14="http://schemas.microsoft.com/office/powerpoint/2010/main" val="3748425221"/>
       </p:ext>
     </p:extLst>
   </p:cSld>
@@ -10006,7 +10006,7 @@
           <p:cNvPr id="2" name="タイトル 1">
             <a:extLst>
               <a:ext uri="{FF2B5EF4-FFF2-40B4-BE49-F238E27FC236}">
-                <a16:creationId xmlns:a16="http://schemas.microsoft.com/office/drawing/2014/main" id="{720922A1-222D-AE71-30CF-77208D5FB0C4}"/>
+                <a16:creationId xmlns:a16="http://schemas.microsoft.com/office/drawing/2014/main" id="{C5E7D09C-EE0C-4C0A-956B-C914693E831C}"/>
               </a:ext>
             </a:extLst>
           </p:cNvPr>
@@ -10041,7 +10041,7 @@
     </p:spTree>
     <p:extLst>
       <p:ext uri="{BB962C8B-B14F-4D97-AF65-F5344CB8AC3E}">
-        <p14:creationId xmlns:p14="http://schemas.microsoft.com/office/powerpoint/2010/main" val="4063865958"/>
+        <p14:creationId xmlns:p14="http://schemas.microsoft.com/office/powerpoint/2010/main" val="3464614780"/>
       </p:ext>
     </p:extLst>
   </p:cSld>
@@ -10073,7 +10073,7 @@
           <p:cNvPr id="2" name="タイトル 1">
             <a:extLst>
               <a:ext uri="{FF2B5EF4-FFF2-40B4-BE49-F238E27FC236}">
-                <a16:creationId xmlns:a16="http://schemas.microsoft.com/office/drawing/2014/main" id="{4DA3996A-F0F5-0ABD-6BDA-E0D5E28B1FDF}"/>
+                <a16:creationId xmlns:a16="http://schemas.microsoft.com/office/drawing/2014/main" id="{BE6A970D-2F38-CEDF-BF18-FE930D406918}"/>
               </a:ext>
             </a:extLst>
           </p:cNvPr>
@@ -10108,7 +10108,7 @@
     </p:spTree>
     <p:extLst>
       <p:ext uri="{BB962C8B-B14F-4D97-AF65-F5344CB8AC3E}">
-        <p14:creationId xmlns:p14="http://schemas.microsoft.com/office/powerpoint/2010/main" val="2666530846"/>
+        <p14:creationId xmlns:p14="http://schemas.microsoft.com/office/powerpoint/2010/main" val="2062363099"/>
       </p:ext>
     </p:extLst>
   </p:cSld>
@@ -10140,7 +10140,7 @@
           <p:cNvPr id="2" name="タイトル 1">
             <a:extLst>
               <a:ext uri="{FF2B5EF4-FFF2-40B4-BE49-F238E27FC236}">
-                <a16:creationId xmlns:a16="http://schemas.microsoft.com/office/drawing/2014/main" id="{74A1E490-713F-A38D-6E24-535A5D70EFB2}"/>
+                <a16:creationId xmlns:a16="http://schemas.microsoft.com/office/drawing/2014/main" id="{4922B1A6-CF26-B9FC-4B7F-4AFAB65C1EDA}"/>
               </a:ext>
             </a:extLst>
           </p:cNvPr>
@@ -10175,7 +10175,7 @@
     </p:spTree>
     <p:extLst>
       <p:ext uri="{BB962C8B-B14F-4D97-AF65-F5344CB8AC3E}">
-        <p14:creationId xmlns:p14="http://schemas.microsoft.com/office/powerpoint/2010/main" val="1029619335"/>
+        <p14:creationId xmlns:p14="http://schemas.microsoft.com/office/powerpoint/2010/main" val="37460682"/>
       </p:ext>
     </p:extLst>
   </p:cSld>
@@ -10207,7 +10207,7 @@
           <p:cNvPr id="2" name="タイトル 1">
             <a:extLst>
               <a:ext uri="{FF2B5EF4-FFF2-40B4-BE49-F238E27FC236}">
-                <a16:creationId xmlns:a16="http://schemas.microsoft.com/office/drawing/2014/main" id="{B0F7E963-8164-99ED-7CE5-43B8F627A2D2}"/>
+                <a16:creationId xmlns:a16="http://schemas.microsoft.com/office/drawing/2014/main" id="{7F1A90C5-5A1C-9CFD-F0CD-955723A41D9B}"/>
               </a:ext>
             </a:extLst>
           </p:cNvPr>
@@ -10242,7 +10242,7 @@
     </p:spTree>
     <p:extLst>
       <p:ext uri="{BB962C8B-B14F-4D97-AF65-F5344CB8AC3E}">
-        <p14:creationId xmlns:p14="http://schemas.microsoft.com/office/powerpoint/2010/main" val="2269418753"/>
+        <p14:creationId xmlns:p14="http://schemas.microsoft.com/office/powerpoint/2010/main" val="4012977586"/>
       </p:ext>
     </p:extLst>
   </p:cSld>
@@ -10274,7 +10274,7 @@
           <p:cNvPr id="2" name="タイトル 1">
             <a:extLst>
               <a:ext uri="{FF2B5EF4-FFF2-40B4-BE49-F238E27FC236}">
-                <a16:creationId xmlns:a16="http://schemas.microsoft.com/office/drawing/2014/main" id="{78949D8C-F98F-BD51-C1F0-134ADE1AEBD7}"/>
+                <a16:creationId xmlns:a16="http://schemas.microsoft.com/office/drawing/2014/main" id="{D25388A9-01BE-0C9F-3920-9AC68AC375CC}"/>
               </a:ext>
             </a:extLst>
           </p:cNvPr>
@@ -10309,7 +10309,7 @@
     </p:spTree>
     <p:extLst>
       <p:ext uri="{BB962C8B-B14F-4D97-AF65-F5344CB8AC3E}">
-        <p14:creationId xmlns:p14="http://schemas.microsoft.com/office/powerpoint/2010/main" val="4216088888"/>
+        <p14:creationId xmlns:p14="http://schemas.microsoft.com/office/powerpoint/2010/main" val="4088806744"/>
       </p:ext>
     </p:extLst>
   </p:cSld>
@@ -10341,7 +10341,7 @@
           <p:cNvPr id="2" name="タイトル 1">
             <a:extLst>
               <a:ext uri="{FF2B5EF4-FFF2-40B4-BE49-F238E27FC236}">
-                <a16:creationId xmlns:a16="http://schemas.microsoft.com/office/drawing/2014/main" id="{F1DF5C24-ECC7-7288-2A2C-1A5F588A3A20}"/>
+                <a16:creationId xmlns:a16="http://schemas.microsoft.com/office/drawing/2014/main" id="{CD608741-5914-EE8D-90A0-501710D2A9F9}"/>
               </a:ext>
             </a:extLst>
           </p:cNvPr>
@@ -10376,7 +10376,7 @@
     </p:spTree>
     <p:extLst>
       <p:ext uri="{BB962C8B-B14F-4D97-AF65-F5344CB8AC3E}">
-        <p14:creationId xmlns:p14="http://schemas.microsoft.com/office/powerpoint/2010/main" val="1093437598"/>
+        <p14:creationId xmlns:p14="http://schemas.microsoft.com/office/powerpoint/2010/main" val="4274253801"/>
       </p:ext>
     </p:extLst>
   </p:cSld>
